--- a/Bachelorarbeit Präsentation Version 1.pptx
+++ b/Bachelorarbeit Präsentation Version 1.pptx
@@ -17,9 +17,9 @@
     <p:sldId id="342" r:id="rId8"/>
     <p:sldId id="343" r:id="rId9"/>
     <p:sldId id="344" r:id="rId10"/>
-    <p:sldId id="345" r:id="rId11"/>
-    <p:sldId id="346" r:id="rId12"/>
-    <p:sldId id="347" r:id="rId13"/>
+    <p:sldId id="347" r:id="rId11"/>
+    <p:sldId id="345" r:id="rId12"/>
+    <p:sldId id="346" r:id="rId13"/>
     <p:sldId id="348" r:id="rId14"/>
     <p:sldId id="349" r:id="rId15"/>
     <p:sldId id="350" r:id="rId16"/>
@@ -138,6 +138,27 @@
     </p:ext>
   </p:extLst>
 </p:presentation>
+</file>
+
+<file path=ppt/changesInfos/changesInfo1.xml><?xml version="1.0" encoding="utf-8"?>
+<pc:chgInfo xmlns:a="http://schemas.openxmlformats.org/drawingml/2006/main" xmlns:r="http://schemas.openxmlformats.org/officeDocument/2006/relationships" xmlns:ac="http://schemas.microsoft.com/office/drawing/2013/main/command" xmlns:pc="http://schemas.microsoft.com/office/powerpoint/2013/main/command">
+  <pc:docChgLst>
+    <pc:chgData name="Nuber, Nathalie" userId="64826a5e-75fc-44e6-a073-417b106d7220" providerId="ADAL" clId="{2D240D19-45E2-4320-A1B7-FEF1D055401D}"/>
+    <pc:docChg chg="modSld sldOrd">
+      <pc:chgData name="Nuber, Nathalie" userId="64826a5e-75fc-44e6-a073-417b106d7220" providerId="ADAL" clId="{2D240D19-45E2-4320-A1B7-FEF1D055401D}" dt="2026-09-20T07:32:52.113" v="1"/>
+      <pc:docMkLst>
+        <pc:docMk/>
+      </pc:docMkLst>
+      <pc:sldChg chg="ord">
+        <pc:chgData name="Nuber, Nathalie" userId="64826a5e-75fc-44e6-a073-417b106d7220" providerId="ADAL" clId="{2D240D19-45E2-4320-A1B7-FEF1D055401D}" dt="2026-09-20T07:32:52.113" v="1"/>
+        <pc:sldMkLst>
+          <pc:docMk/>
+          <pc:sldMk cId="0" sldId="347"/>
+        </pc:sldMkLst>
+      </pc:sldChg>
+    </pc:docChg>
+  </pc:docChgLst>
+</pc:chgInfo>
 </file>
 
 <file path=ppt/handoutMasters/handoutMaster1.xml><?xml version="1.0" encoding="utf-8"?>
@@ -2681,79 +2702,91 @@
           <a:p>
             <a:r>
               <a:rPr lang="de-DE" b="1" dirty="0"/>
-              <a:t>Schritt 1 – Die regulatorische Ausgangslage</a:t>
+              <a:t>Schritt 1 – Die regulatorische Pflicht</a:t>
             </a:r>
           </a:p>
           <a:p>
             <a:r>
               <a:rPr lang="de-DE" dirty="0"/>
-              <a:t>Oben im Trichter steht die Verordnung (EU) 2023/1230. Anhang III formuliert in den Abschnitten 1.1.9 und 1.2.1 den Schutz vor Korruption sowie die Zuverlässigkeit und Integrität von Steuerungssystemen. Die Ebene ist bewusst die breiteste: Sie gilt für die Maschine als Ganzes und ist absichtlich technologieoffen formuliert.</a:t>
+              <a:t>Diese Folie zeigt exemplarisch, wie aus einem Rechtstext ein ausführbarer Testfall wird. Ausgangspunkt ist Anhang III, Abschnitt 1.2.1 der Maschinenverordnung. Dort wird verlangt, dass Eingriffe in sicherheitsrelevante Software und Parameter nachvollziehbar aufgezeichnet werden. Das Tracing-Log muss die Änderung identifizierbar machen und ist fünf Jahre aufzubewahren.</a:t>
             </a:r>
           </a:p>
           <a:p>
             <a:r>
               <a:rPr lang="de-DE" dirty="0"/>
-              <a:t>Genau darin liegt die Schwierigkeit. Der Text sagt, was erreicht werden muss, aber nicht, wie es technisch umzusetzen oder nachzuweisen ist. Aus dieser Ebene allein lässt sich kein Testfall ableiten.</a:t>
+              <a:t>Wichtig ist der Charakter dieser Anforderung: Sie nennt ein Ziel und eine Frist, aber kein technisches Format, keinen Mindestinhalt und kein Prüfverfahren. In dieser Form ist sie nicht testbar.</a:t>
             </a:r>
           </a:p>
           <a:p>
             <a:r>
               <a:rPr lang="de-DE" b="1" dirty="0"/>
-              <a:t>Schritt 2 – Die technische Übersetzung durch prEN 50742</a:t>
+              <a:t>Schritt 2 – Die technische Präzisierung</a:t>
             </a:r>
           </a:p>
           <a:p>
             <a:r>
               <a:rPr lang="de-DE" dirty="0"/>
-              <a:t>Die mittlere Ebene ist die Brücke. Die prEN 50742 ist die harmonisierte Norm, die den Schutz vor Korruption technisch konkretisiert. Sie schließt die Lücke zwischen dem Rechtstext und einer prüfbaren Umsetzung.</a:t>
+              <a:t>Die harmonisierte Norm prEN 50742 konkretisiert diese Pflicht in Abschnitt 7.3.4. Dort wird beschrieben, welche Angaben ein solcher Eintrag mindestens enthalten muss und wie die Aufbewahrung sicherzustellen ist. Damit wird aus einer rechtlichen Erwartung eine technische Vorgabe, die man prüfen kann.</a:t>
             </a:r>
           </a:p>
           <a:p>
             <a:r>
               <a:rPr lang="de-DE" dirty="0"/>
-              <a:t>Entscheidend ist Approach B: Statt eigene Anforderungen neu zu formulieren, verweist er auf das etablierte Regelwerk der IEC 62443. Das ist ein wichtiger Hebel, weil damit vorhandene, industriell erprobte Anforderungen und Prüfpraktiken anschlussfähig werden, statt dass ein paralleles Nachweissystem entsteht.</a:t>
+              <a:t>Diese Zwischenstufe ist der Grund, warum die harmonisierte Norm für die Praxis so wichtig ist: Sie liefert die Auslegung, auf die sich Hersteller und Auditor gemeinsam beziehen können.</a:t>
             </a:r>
           </a:p>
           <a:p>
             <a:r>
               <a:rPr lang="de-DE" b="1" dirty="0"/>
-              <a:t>Schritt 3 – Die konkreten Komponentenanforderungen</a:t>
+              <a:t>Schritt 3 – Die komponentenspezifische Übersetzung</a:t>
             </a:r>
           </a:p>
           <a:p>
             <a:r>
               <a:rPr lang="de-DE" dirty="0"/>
-              <a:t>Die unterste und schmalste Ebene ist die Ebene, auf der diese Arbeit tatsächlich prüft. Die IEC 62443-4-2 formuliert Component Requirements, also überprüfbare Eigenschaften einer einzelnen Komponente: Identifikation und Authentifizierung, Nutzungssteuerung, Systemintegrität, Vertraulichkeit der Daten, eingeschränkter Datenfluss, zeitnahe Reaktion auf Ereignisse und Verfügbarkeit der Ressourcen.</a:t>
+              <a:t>Über Approach B führt der Weg weiter in die IEC 62443-4-2. Zwei Component Requirements greifen hier unmittelbar: CR 2.8, Auditable Events, verlangt, dass sicherheitsrelevante Ereignisse überhaupt protokolliert werden, und CR 2.9, Audit Storage Capacity, verlangt ausreichende Speicherkapazität sowie ein definiertes Verhalten, wenn der Speicher voll läuft.</a:t>
             </a:r>
           </a:p>
           <a:p>
             <a:r>
               <a:rPr lang="de-DE" dirty="0"/>
-              <a:t>Damit ist die Übersetzungskette vollständig: aus einer Maschinenpflicht wird über die harmonisierte Norm eine konkrete Anforderung an das Gateway. Erst auf dieser Ebene lassen sich Testfälle formulieren, deren Ergebnisse regulatorisch anschlussfähig sind.</a:t>
+              <a:t>Damit ist die Anforderung auf der Ebene der Komponente angekommen. Sie beschreibt jetzt Eigenschaften des Gateways selbst und nicht mehr Pflichten der Gesamtmaschine.</a:t>
             </a:r>
           </a:p>
           <a:p>
             <a:r>
               <a:rPr lang="de-DE" b="1" dirty="0"/>
-              <a:t>Schritt 4 – Die Verifikationslogik der IEC 62443-4-1</a:t>
+              <a:t>Schritt 4 – Der konkrete Testfall</a:t>
             </a:r>
           </a:p>
           <a:p>
             <a:r>
               <a:rPr lang="de-DE" dirty="0"/>
-              <a:t>Der Kasten rechts steht bewusst quer zu allen drei Ebenen. Die IEC 62443-4-1 beschreibt den sicheren Entwicklungsprozess, die Practice SVV steht für Security Verification and Validation Testing. Sie legt nicht fest, was gefordert ist, sondern wie verifiziert wird.</a:t>
+              <a:t>Das letzte Segment ist bewusst in der Akzentfarbe hervorgehoben, denn hier wird die Kette praktisch. Am Prüfling wird ein sicherheitsrelevantes Ereignis ausgelöst und überprüft, ob ein Eintrag entsteht, ob er die geforderten Angaben enthält, ob er gegen Manipulation geschützt ist und wie sich das Gerät bei erschöpftem Speicher verhält.</a:t>
             </a:r>
           </a:p>
           <a:p>
             <a:r>
               <a:rPr lang="de-DE" dirty="0"/>
-              <a:t>Dazu gehören Funktionstests der Sicherheitsanforderungen, Tests auf Schwachstellen, Penetrationstests und Tests der Angriffsfläche. Die drei Pfeile zeigen: Diese Verifikationslogik ist auf jeder Ebene anwendbar und verbindet die Kette zu einem nachweisfähigen Ganzen.</a:t>
+              <a:t>Entscheidend ist die Durchgängigkeit: Jedes Testergebnis lässt sich rückwärts bis zum Anhang III zurückverfolgen. Genau diese Rückverfolgbarkeit macht den Nachweis gegenüber Dritten belastbar.</a:t>
+            </a:r>
+          </a:p>
+          <a:p>
+            <a:r>
+              <a:rPr lang="de-DE" b="1" dirty="0"/>
+              <a:t>Schritt 5 – Einordnung in das Gesamtbild</a:t>
             </a:r>
           </a:p>
           <a:p>
             <a:r>
               <a:rPr lang="de-DE" dirty="0"/>
-              <a:t>Überleitung: Aus dieser Struktur ergibt sich das methodische Vorgehen der Arbeit – Anforderungen aus 62443-4-2 ableiten und sie mit der Prüflogik der Practice SVV in konkrete Testfälle für das Gateway überführen.</a:t>
+              <a:t>Die Fußzeile ordnet das Beispiel ein: RQ-012 ist eine von insgesamt vierzehn abgeleiteten Anforderungen, die nach demselben Schema entstanden sind. Als Bewertungsbasis dient SL-C 1, also die niedrigste Sicherheitsstufe, die gegen zufällige oder gelegentliche Verstöße mit einfachen Mitteln schützt.</a:t>
+            </a:r>
+          </a:p>
+          <a:p>
+            <a:r>
+              <a:rPr lang="de-DE" dirty="0"/>
+              <a:t>Diese Festlegung ist bewusst getroffen: Sie entspricht dem realistischen Schutzbedarf des betrachteten Geräts und hält den Umfang der Arbeit beherrschbar. Das Vorgehen selbst bleibt auf höhere Security Level übertragbar.</a:t>
             </a:r>
           </a:p>
         </p:txBody>
@@ -2817,85 +2850,79 @@
           <a:p>
             <a:r>
               <a:rPr lang="de-DE" b="1" dirty="0"/>
-              <a:t>Schritt 1 – Problemidentifikation (Kapitel 1)</a:t>
+              <a:t>Schritt 1 – Die regulatorische Ausgangslage</a:t>
             </a:r>
           </a:p>
           <a:p>
             <a:r>
               <a:rPr lang="de-DE" dirty="0"/>
-              <a:t>Die Prozesskette zeigt das Forschungsdesign nach der Design Science Research Methodology. Die erste Aktivität ist die Problemidentifikation: Die Maschinenverordnung verlangt ab 2027 einen Nachweis von Security-Eigenschaften, während die etablierte Validierung in der Produktentwicklung funktional ausgerichtet und nicht security-getrieben ist. Damit fehlt eine durchgängige Methodik von der Anforderung bis zum Testfall. Dieses Problem ist in Kapitel 1 hergeleitet und begründet.</a:t>
+              <a:t>Oben im Trichter steht die Verordnung (EU) 2023/1230. Anhang III formuliert in den Abschnitten 1.1.9 und 1.2.1 den Schutz vor Korruption sowie die Zuverlässigkeit und Integrität von Steuerungssystemen. Die Ebene ist bewusst die breiteste: Sie gilt für die Maschine als Ganzes und ist absichtlich technologieoffen formuliert.</a:t>
+            </a:r>
+          </a:p>
+          <a:p>
+            <a:r>
+              <a:rPr lang="de-DE" dirty="0"/>
+              <a:t>Genau darin liegt die Schwierigkeit. Der Text sagt, was erreicht werden muss, aber nicht, wie es technisch umzusetzen oder nachzuweisen ist. Aus dieser Ebene allein lässt sich kein Testfall ableiten.</a:t>
             </a:r>
           </a:p>
           <a:p>
             <a:r>
               <a:rPr lang="de-DE" b="1" dirty="0"/>
-              <a:t>Schritt 2 – Zieldefinition (Kapitel 1)</a:t>
+              <a:t>Schritt 2 – Die technische Übersetzung durch prEN 50742</a:t>
             </a:r>
           </a:p>
           <a:p>
             <a:r>
               <a:rPr lang="de-DE" dirty="0"/>
-              <a:t>Daraus wird das Ziel abgeleitet, ebenfalls in Kapitel 1. Angestrebt wird kein einzelnes Testergebnis, sondern ein nachvollziehbares Vorgehen: Anforderungen aus dem Normenrahmen ableiten, daraus prüfbare Testfälle für ein industrielles Gateway formen und die Ergebnisse dokumentierbar und wiederholbar machen. Die Zieldefinition legt damit fest, woran der Erfolg der Arbeit gemessen wird.</a:t>
+              <a:t>Die mittlere Ebene ist die Brücke. Die prEN 50742 ist die harmonisierte Norm, die den Schutz vor Korruption technisch konkretisiert. Sie schließt die Lücke zwischen dem Rechtstext und einer prüfbaren Umsetzung.</a:t>
+            </a:r>
+          </a:p>
+          <a:p>
+            <a:r>
+              <a:rPr lang="de-DE" dirty="0"/>
+              <a:t>Entscheidend ist Approach B: Statt eigene Anforderungen neu zu formulieren, verweist er auf das etablierte Regelwerk der IEC 62443. Das ist ein wichtiger Hebel, weil damit vorhandene, industriell erprobte Anforderungen und Prüfpraktiken anschlussfähig werden, statt dass ein paralleles Nachweissystem entsteht.</a:t>
             </a:r>
           </a:p>
           <a:p>
             <a:r>
               <a:rPr lang="de-DE" b="1" dirty="0"/>
-              <a:t>Schritt 3 – Design und Entwicklung (Kapitel 3)</a:t>
+              <a:t>Schritt 3 – Die konkreten Komponentenanforderungen</a:t>
             </a:r>
           </a:p>
           <a:p>
             <a:r>
               <a:rPr lang="de-DE" dirty="0"/>
-              <a:t>Die dritte Aktivität ist bewusst farblich hervorgehoben, weil hier das eigentliche Artefakt entsteht. In Kapitel 3 wird die Testmethodik entwickelt: die Ableitung der Component Requirements aus der IEC 62443-4-2, deren Verknüpfung mit der Prüflogik der Practice SVV aus der IEC 62443-4-1 und die Strukturierung in Testkategorien und Testfälle. Das ist der Kern des wissenschaftlichen Beitrags.</a:t>
+              <a:t>Die unterste und schmalste Ebene ist die Ebene, auf der diese Arbeit tatsächlich prüft. Die IEC 62443-4-2 formuliert Component Requirements, also überprüfbare Eigenschaften einer einzelnen Komponente: Identifikation und Authentifizierung, Nutzungssteuerung, Systemintegrität, Vertraulichkeit der Daten, eingeschränkter Datenfluss, zeitnahe Reaktion auf Ereignisse und Verfügbarkeit der Ressourcen.</a:t>
+            </a:r>
+          </a:p>
+          <a:p>
+            <a:r>
+              <a:rPr lang="de-DE" dirty="0"/>
+              <a:t>Damit ist die Übersetzungskette vollständig: aus einer Maschinenpflicht wird über die harmonisierte Norm eine konkrete Anforderung an das Gateway. Erst auf dieser Ebene lassen sich Testfälle formulieren, deren Ergebnisse regulatorisch anschlussfähig sind.</a:t>
             </a:r>
           </a:p>
           <a:p>
             <a:r>
               <a:rPr lang="de-DE" b="1" dirty="0"/>
-              <a:t>Schritt 4 – Demonstration (Kapitel 4)</a:t>
+              <a:t>Schritt 4 – Die Verifikationslogik der IEC 62443-4-1</a:t>
             </a:r>
           </a:p>
           <a:p>
             <a:r>
               <a:rPr lang="de-DE" dirty="0"/>
-              <a:t>Ebenfalls hervorgehoben ist die Demonstration in Kapitel 4. Die entwickelte Methodik wird am konkreten Beispiel eines industriellen Gateways angewendet. Gezeigt wird, dass sich die Testfälle praktisch durchführen lassen und dass die Ergebnisse in einer für einen Nachweis geeigneten Form dokumentiert werden können.</a:t>
-            </a:r>
-          </a:p>
-          <a:p>
-            <a:r>
-              <a:rPr lang="de-DE" b="1" dirty="0"/>
-              <a:t>Schritt 5 – Evaluation (Kapitel 4)</a:t>
+              <a:t>Der Kasten rechts steht bewusst quer zu allen drei Ebenen. Die IEC 62443-4-1 beschreibt den sicheren Entwicklungsprozess, die Practice SVV steht für Security Verification and Validation Testing. Sie legt nicht fest, was gefordert ist, sondern wie verifiziert wird.</a:t>
             </a:r>
           </a:p>
           <a:p>
             <a:r>
               <a:rPr lang="de-DE" dirty="0"/>
-              <a:t>Die Evaluation folgt unmittelbar und gehört ebenfalls zu Kapitel 4. Bewertet wird, ob die Methodik die in der Zieldefinition gesetzten Kriterien erfüllt: Nachvollziehbarkeit, Wiederholbarkeit, Abdeckung der abgeleiteten Anforderungen und Anschlussfähigkeit an den regulatorischen Nachweis. Ebenso wichtig ist die ehrliche Benennung der Grenzen des gewählten Testzugangs.</a:t>
-            </a:r>
-          </a:p>
-          <a:p>
-            <a:r>
-              <a:rPr lang="de-DE" b="1" dirty="0"/>
-              <a:t>Schritt 6 – Kommunikation (Kapitel 5)</a:t>
+              <a:t>Dazu gehören Funktionstests der Sicherheitsanforderungen, Tests auf Schwachstellen, Penetrationstests und Tests der Angriffsfläche. Die drei Pfeile zeigen: Diese Verifikationslogik ist auf jeder Ebene anwendbar und verbindet die Kette zu einem nachweisfähigen Ganzen.</a:t>
             </a:r>
           </a:p>
           <a:p>
             <a:r>
               <a:rPr lang="de-DE" dirty="0"/>
-              <a:t>Die sechste Aktivität ist die Kommunikation in Kapitel 5. Dazu zählen die schriftliche Ausarbeitung, die Übergabe der Methodik an das Unternehmen in einer anwendbaren Form sowie diese Präsentation. Erst damit ist der DSRM-Zyklus vollständig durchlaufen.</a:t>
-            </a:r>
-          </a:p>
-          <a:p>
-            <a:r>
-              <a:rPr lang="de-DE" b="1" dirty="0"/>
-              <a:t>Schritt 7 – Der wissenschaftliche Beitrag</a:t>
-            </a:r>
-          </a:p>
-          <a:p>
-            <a:r>
-              <a:rPr lang="de-DE" dirty="0"/>
-              <a:t>Der Balken unten benennt den entscheidenden Punkt: Artefakt dieser Arbeit ist die Testmethodik, nicht das Testergebnis. Es geht nicht darum, alle denkbaren Tests an einem Gerät vollständig auszuführen, sondern um ein übertragbares, begründetes Vorgehen, das auch auf andere Komponenten und künftige Produkte anwendbar bleibt. Die durchgeführten Tests dienen als Nachweis der Anwendbarkeit, nicht als Selbstzweck.</a:t>
+              <a:t>Überleitung: Aus dieser Struktur ergibt sich das methodische Vorgehen der Arbeit – Anforderungen aus 62443-4-2 ableiten und sie mit der Prüflogik der Practice SVV in konkrete Testfälle für das Gateway überführen.</a:t>
             </a:r>
           </a:p>
         </p:txBody>
@@ -2959,91 +2986,85 @@
           <a:p>
             <a:r>
               <a:rPr lang="de-DE" b="1" dirty="0"/>
-              <a:t>Schritt 1 – Die regulatorische Pflicht</a:t>
+              <a:t>Schritt 1 – Problemidentifikation (Kapitel 1)</a:t>
             </a:r>
           </a:p>
           <a:p>
             <a:r>
               <a:rPr lang="de-DE" dirty="0"/>
-              <a:t>Diese Folie zeigt exemplarisch, wie aus einem Rechtstext ein ausführbarer Testfall wird. Ausgangspunkt ist Anhang III, Abschnitt 1.2.1 der Maschinenverordnung. Dort wird verlangt, dass Eingriffe in sicherheitsrelevante Software und Parameter nachvollziehbar aufgezeichnet werden. Das Tracing-Log muss die Änderung identifizierbar machen und ist fünf Jahre aufzubewahren.</a:t>
+              <a:t>Die Prozesskette zeigt das Forschungsdesign nach der Design Science Research Methodology. Die erste Aktivität ist die Problemidentifikation: Die Maschinenverordnung verlangt ab 2027 einen Nachweis von Security-Eigenschaften, während die etablierte Validierung in der Produktentwicklung funktional ausgerichtet und nicht security-getrieben ist. Damit fehlt eine durchgängige Methodik von der Anforderung bis zum Testfall. Dieses Problem ist in Kapitel 1 hergeleitet und begründet.</a:t>
+            </a:r>
+          </a:p>
+          <a:p>
+            <a:r>
+              <a:rPr lang="de-DE" b="1" dirty="0"/>
+              <a:t>Schritt 2 – Zieldefinition (Kapitel 1)</a:t>
             </a:r>
           </a:p>
           <a:p>
             <a:r>
               <a:rPr lang="de-DE" dirty="0"/>
-              <a:t>Wichtig ist der Charakter dieser Anforderung: Sie nennt ein Ziel und eine Frist, aber kein technisches Format, keinen Mindestinhalt und kein Prüfverfahren. In dieser Form ist sie nicht testbar.</a:t>
+              <a:t>Daraus wird das Ziel abgeleitet, ebenfalls in Kapitel 1. Angestrebt wird kein einzelnes Testergebnis, sondern ein nachvollziehbares Vorgehen: Anforderungen aus dem Normenrahmen ableiten, daraus prüfbare Testfälle für ein industrielles Gateway formen und die Ergebnisse dokumentierbar und wiederholbar machen. Die Zieldefinition legt damit fest, woran der Erfolg der Arbeit gemessen wird.</a:t>
             </a:r>
           </a:p>
           <a:p>
             <a:r>
               <a:rPr lang="de-DE" b="1" dirty="0"/>
-              <a:t>Schritt 2 – Die technische Präzisierung</a:t>
+              <a:t>Schritt 3 – Design und Entwicklung (Kapitel 3)</a:t>
             </a:r>
           </a:p>
           <a:p>
             <a:r>
               <a:rPr lang="de-DE" dirty="0"/>
-              <a:t>Die harmonisierte Norm prEN 50742 konkretisiert diese Pflicht in Abschnitt 7.3.4. Dort wird beschrieben, welche Angaben ein solcher Eintrag mindestens enthalten muss und wie die Aufbewahrung sicherzustellen ist. Damit wird aus einer rechtlichen Erwartung eine technische Vorgabe, die man prüfen kann.</a:t>
+              <a:t>Die dritte Aktivität ist bewusst farblich hervorgehoben, weil hier das eigentliche Artefakt entsteht. In Kapitel 3 wird die Testmethodik entwickelt: die Ableitung der Component Requirements aus der IEC 62443-4-2, deren Verknüpfung mit der Prüflogik der Practice SVV aus der IEC 62443-4-1 und die Strukturierung in Testkategorien und Testfälle. Das ist der Kern des wissenschaftlichen Beitrags.</a:t>
+            </a:r>
+          </a:p>
+          <a:p>
+            <a:r>
+              <a:rPr lang="de-DE" b="1" dirty="0"/>
+              <a:t>Schritt 4 – Demonstration (Kapitel 4)</a:t>
             </a:r>
           </a:p>
           <a:p>
             <a:r>
               <a:rPr lang="de-DE" dirty="0"/>
-              <a:t>Diese Zwischenstufe ist der Grund, warum die harmonisierte Norm für die Praxis so wichtig ist: Sie liefert die Auslegung, auf die sich Hersteller und Auditor gemeinsam beziehen können.</a:t>
+              <a:t>Ebenfalls hervorgehoben ist die Demonstration in Kapitel 4. Die entwickelte Methodik wird am konkreten Beispiel eines industriellen Gateways angewendet. Gezeigt wird, dass sich die Testfälle praktisch durchführen lassen und dass die Ergebnisse in einer für einen Nachweis geeigneten Form dokumentiert werden können.</a:t>
             </a:r>
           </a:p>
           <a:p>
             <a:r>
               <a:rPr lang="de-DE" b="1" dirty="0"/>
-              <a:t>Schritt 3 – Die komponentenspezifische Übersetzung</a:t>
+              <a:t>Schritt 5 – Evaluation (Kapitel 4)</a:t>
             </a:r>
           </a:p>
           <a:p>
             <a:r>
               <a:rPr lang="de-DE" dirty="0"/>
-              <a:t>Über Approach B führt der Weg weiter in die IEC 62443-4-2. Zwei Component Requirements greifen hier unmittelbar: CR 2.8, Auditable Events, verlangt, dass sicherheitsrelevante Ereignisse überhaupt protokolliert werden, und CR 2.9, Audit Storage Capacity, verlangt ausreichende Speicherkapazität sowie ein definiertes Verhalten, wenn der Speicher voll läuft.</a:t>
+              <a:t>Die Evaluation folgt unmittelbar und gehört ebenfalls zu Kapitel 4. Bewertet wird, ob die Methodik die in der Zieldefinition gesetzten Kriterien erfüllt: Nachvollziehbarkeit, Wiederholbarkeit, Abdeckung der abgeleiteten Anforderungen und Anschlussfähigkeit an den regulatorischen Nachweis. Ebenso wichtig ist die ehrliche Benennung der Grenzen des gewählten Testzugangs.</a:t>
+            </a:r>
+          </a:p>
+          <a:p>
+            <a:r>
+              <a:rPr lang="de-DE" b="1" dirty="0"/>
+              <a:t>Schritt 6 – Kommunikation (Kapitel 5)</a:t>
             </a:r>
           </a:p>
           <a:p>
             <a:r>
               <a:rPr lang="de-DE" dirty="0"/>
-              <a:t>Damit ist die Anforderung auf der Ebene der Komponente angekommen. Sie beschreibt jetzt Eigenschaften des Gateways selbst und nicht mehr Pflichten der Gesamtmaschine.</a:t>
+              <a:t>Die sechste Aktivität ist die Kommunikation in Kapitel 5. Dazu zählen die schriftliche Ausarbeitung, die Übergabe der Methodik an das Unternehmen in einer anwendbaren Form sowie diese Präsentation. Erst damit ist der DSRM-Zyklus vollständig durchlaufen.</a:t>
             </a:r>
           </a:p>
           <a:p>
             <a:r>
               <a:rPr lang="de-DE" b="1" dirty="0"/>
-              <a:t>Schritt 4 – Der konkrete Testfall</a:t>
+              <a:t>Schritt 7 – Der wissenschaftliche Beitrag</a:t>
             </a:r>
           </a:p>
           <a:p>
             <a:r>
               <a:rPr lang="de-DE" dirty="0"/>
-              <a:t>Das letzte Segment ist bewusst in der Akzentfarbe hervorgehoben, denn hier wird die Kette praktisch. Am Prüfling wird ein sicherheitsrelevantes Ereignis ausgelöst und überprüft, ob ein Eintrag entsteht, ob er die geforderten Angaben enthält, ob er gegen Manipulation geschützt ist und wie sich das Gerät bei erschöpftem Speicher verhält.</a:t>
-            </a:r>
-          </a:p>
-          <a:p>
-            <a:r>
-              <a:rPr lang="de-DE" dirty="0"/>
-              <a:t>Entscheidend ist die Durchgängigkeit: Jedes Testergebnis lässt sich rückwärts bis zum Anhang III zurückverfolgen. Genau diese Rückverfolgbarkeit macht den Nachweis gegenüber Dritten belastbar.</a:t>
-            </a:r>
-          </a:p>
-          <a:p>
-            <a:r>
-              <a:rPr lang="de-DE" b="1" dirty="0"/>
-              <a:t>Schritt 5 – Einordnung in das Gesamtbild</a:t>
-            </a:r>
-          </a:p>
-          <a:p>
-            <a:r>
-              <a:rPr lang="de-DE" dirty="0"/>
-              <a:t>Die Fußzeile ordnet das Beispiel ein: RQ-012 ist eine von insgesamt vierzehn abgeleiteten Anforderungen, die nach demselben Schema entstanden sind. Als Bewertungsbasis dient SL-C 1, also die niedrigste Sicherheitsstufe, die gegen zufällige oder gelegentliche Verstöße mit einfachen Mitteln schützt.</a:t>
-            </a:r>
-          </a:p>
-          <a:p>
-            <a:r>
-              <a:rPr lang="de-DE" dirty="0"/>
-              <a:t>Diese Festlegung ist bewusst getroffen: Sie entspricht dem realistischen Schutzbedarf des betrachteten Geräts und hält den Umfang der Arbeit beherrschbar. Das Vorgehen selbst bleibt auf höhere Security Level übertragbar.</a:t>
+              <a:t>Der Balken unten benennt den entscheidenden Punkt: Artefakt dieser Arbeit ist die Testmethodik, nicht das Testergebnis. Es geht nicht darum, alle denkbaren Tests an einem Gerät vollständig auszuführen, sondern um ein übertragbares, begründetes Vorgehen, das auch auf andere Komponenten und künftige Produkte anwendbar bleibt. Die durchgeführten Tests dienen als Nachweis der Anwendbarkeit, nicht als Selbstzweck.</a:t>
             </a:r>
           </a:p>
         </p:txBody>
@@ -3263,7 +3284,13 @@
                   <p:embed/>
                   <p:pic>
                     <p:nvPicPr>
-                      <p:cNvPr id="0" name=""/>
+                      <p:cNvPr id="5" name="think-cell data - do not delete" hidden="1">
+                        <a:extLst>
+                          <a:ext uri="{FF2B5EF4-FFF2-40B4-BE49-F238E27FC236}">
+                            <a16:creationId xmlns:a16="http://schemas.microsoft.com/office/drawing/2014/main" id="{250100DB-63C2-9910-B81D-421C05004ABE}"/>
+                          </a:ext>
+                        </a:extLst>
+                      </p:cNvPr>
                       <p:cNvPicPr/>
                       <p:nvPr/>
                     </p:nvPicPr>
@@ -4093,7 +4120,13 @@
                   <p:embed/>
                   <p:pic>
                     <p:nvPicPr>
-                      <p:cNvPr id="0" name=""/>
+                      <p:cNvPr id="8" name="think-cell data - do not delete" hidden="1">
+                        <a:extLst>
+                          <a:ext uri="{FF2B5EF4-FFF2-40B4-BE49-F238E27FC236}">
+                            <a16:creationId xmlns:a16="http://schemas.microsoft.com/office/drawing/2014/main" id="{340A459E-5386-0A57-4541-79BDC3011258}"/>
+                          </a:ext>
+                        </a:extLst>
+                      </p:cNvPr>
                       <p:cNvPicPr/>
                       <p:nvPr/>
                     </p:nvPicPr>
@@ -14693,7 +14726,13 @@
                   <p:embed/>
                   <p:pic>
                     <p:nvPicPr>
-                      <p:cNvPr id="0" name=""/>
+                      <p:cNvPr id="12" name="think-cell data - do not delete" hidden="1">
+                        <a:extLst>
+                          <a:ext uri="{FF2B5EF4-FFF2-40B4-BE49-F238E27FC236}">
+                            <a16:creationId xmlns:a16="http://schemas.microsoft.com/office/drawing/2014/main" id="{D7FE9896-5211-23DE-0A2A-059929C8D9CA}"/>
+                          </a:ext>
+                        </a:extLst>
+                      </p:cNvPr>
                       <p:cNvPicPr/>
                       <p:nvPr/>
                     </p:nvPicPr>
@@ -16545,7 +16584,13 @@
                   <p:embed/>
                   <p:pic>
                     <p:nvPicPr>
-                      <p:cNvPr id="0" name=""/>
+                      <p:cNvPr id="5" name="think-cell data - do not delete" hidden="1">
+                        <a:extLst>
+                          <a:ext uri="{FF2B5EF4-FFF2-40B4-BE49-F238E27FC236}">
+                            <a16:creationId xmlns:a16="http://schemas.microsoft.com/office/drawing/2014/main" id="{4AE8476C-3A63-D1D8-D079-F3F9989CAAAC}"/>
+                          </a:ext>
+                        </a:extLst>
+                      </p:cNvPr>
                       <p:cNvPicPr/>
                       <p:nvPr/>
                     </p:nvPicPr>
@@ -19113,7 +19158,13 @@
                   <p:embed/>
                   <p:pic>
                     <p:nvPicPr>
-                      <p:cNvPr id="0" name=""/>
+                      <p:cNvPr id="12" name="think-cell data - do not delete" hidden="1">
+                        <a:extLst>
+                          <a:ext uri="{FF2B5EF4-FFF2-40B4-BE49-F238E27FC236}">
+                            <a16:creationId xmlns:a16="http://schemas.microsoft.com/office/drawing/2014/main" id="{2178A092-4712-C262-2FCB-E37DDCD7F55F}"/>
+                          </a:ext>
+                        </a:extLst>
+                      </p:cNvPr>
                       <p:cNvPicPr/>
                       <p:nvPr/>
                     </p:nvPicPr>
@@ -19431,7 +19482,13 @@
                   <p:embed/>
                   <p:pic>
                     <p:nvPicPr>
-                      <p:cNvPr id="0" name=""/>
+                      <p:cNvPr id="6" name="think-cell data - do not delete" hidden="1">
+                        <a:extLst>
+                          <a:ext uri="{FF2B5EF4-FFF2-40B4-BE49-F238E27FC236}">
+                            <a16:creationId xmlns:a16="http://schemas.microsoft.com/office/drawing/2014/main" id="{ABF1462E-821F-E0BE-6720-CB0771694BAA}"/>
+                          </a:ext>
+                        </a:extLst>
+                      </p:cNvPr>
                       <p:cNvPicPr/>
                       <p:nvPr/>
                     </p:nvPicPr>
@@ -19910,7 +19967,13 @@
                   <p:embed/>
                   <p:pic>
                     <p:nvPicPr>
-                      <p:cNvPr id="0" name=""/>
+                      <p:cNvPr id="6" name="think-cell data - do not delete" hidden="1">
+                        <a:extLst>
+                          <a:ext uri="{FF2B5EF4-FFF2-40B4-BE49-F238E27FC236}">
+                            <a16:creationId xmlns:a16="http://schemas.microsoft.com/office/drawing/2014/main" id="{242A970C-00C3-B51C-45CA-D053C2244486}"/>
+                          </a:ext>
+                        </a:extLst>
+                      </p:cNvPr>
                       <p:cNvPicPr/>
                       <p:nvPr/>
                     </p:nvPicPr>
@@ -21467,7 +21530,13 @@
                   <p:embed/>
                   <p:pic>
                     <p:nvPicPr>
-                      <p:cNvPr id="0" name=""/>
+                      <p:cNvPr id="8" name="think-cell data - do not delete" hidden="1">
+                        <a:extLst>
+                          <a:ext uri="{FF2B5EF4-FFF2-40B4-BE49-F238E27FC236}">
+                            <a16:creationId xmlns:a16="http://schemas.microsoft.com/office/drawing/2014/main" id="{E570FB4C-14D3-D471-76FD-B83B18415E1E}"/>
+                          </a:ext>
+                        </a:extLst>
+                      </p:cNvPr>
                       <p:cNvPicPr/>
                       <p:nvPr/>
                     </p:nvPicPr>
@@ -23422,7 +23491,13 @@
                   <p:embed/>
                   <p:pic>
                     <p:nvPicPr>
-                      <p:cNvPr id="0" name=""/>
+                      <p:cNvPr id="13" name="think-cell data - do not delete" hidden="1">
+                        <a:extLst>
+                          <a:ext uri="{FF2B5EF4-FFF2-40B4-BE49-F238E27FC236}">
+                            <a16:creationId xmlns:a16="http://schemas.microsoft.com/office/drawing/2014/main" id="{71FE449C-25CA-1564-3038-AC87F4EB84DD}"/>
+                          </a:ext>
+                        </a:extLst>
+                      </p:cNvPr>
                       <p:cNvPicPr/>
                       <p:nvPr/>
                     </p:nvPicPr>
@@ -36593,7 +36668,13 @@
                   <p:embed/>
                   <p:pic>
                     <p:nvPicPr>
-                      <p:cNvPr id="0" name=""/>
+                      <p:cNvPr id="12" name="think-cell data - do not delete" hidden="1">
+                        <a:extLst>
+                          <a:ext uri="{FF2B5EF4-FFF2-40B4-BE49-F238E27FC236}">
+                            <a16:creationId xmlns:a16="http://schemas.microsoft.com/office/drawing/2014/main" id="{CB6771DC-6CD4-DE4E-110A-7A1066A207C1}"/>
+                          </a:ext>
+                        </a:extLst>
+                      </p:cNvPr>
                       <p:cNvPicPr/>
                       <p:nvPr/>
                     </p:nvPicPr>
@@ -40493,6 +40574,867 @@
 </file>
 
 <file path=ppt/slides/slide7.xml><?xml version="1.0" encoding="utf-8"?>
+<p:sld xmlns:a="http://schemas.openxmlformats.org/drawingml/2006/main" xmlns:r="http://schemas.openxmlformats.org/officeDocument/2006/relationships" xmlns:p="http://schemas.openxmlformats.org/presentationml/2006/main">
+  <p:cSld>
+    <p:spTree>
+      <p:nvGrpSpPr>
+        <p:cNvPr id="1" name=""/>
+        <p:cNvGrpSpPr/>
+        <p:nvPr/>
+      </p:nvGrpSpPr>
+      <p:grpSpPr>
+        <a:xfrm>
+          <a:off x="0" y="0"/>
+          <a:ext cx="0" cy="0"/>
+          <a:chOff x="0" y="0"/>
+          <a:chExt cx="0" cy="0"/>
+        </a:xfrm>
+      </p:grpSpPr>
+      <p:sp>
+        <p:nvSpPr>
+          <p:cNvPr id="2" name="Titel 1"/>
+          <p:cNvSpPr>
+            <a:spLocks noGrp="1"/>
+          </p:cNvSpPr>
+          <p:nvPr>
+            <p:ph type="title"/>
+          </p:nvPr>
+        </p:nvSpPr>
+        <p:spPr/>
+        <p:txBody>
+          <a:bodyPr/>
+          <a:lstStyle/>
+          <a:p>
+            <a:r>
+              <a:rPr lang="de-DE" dirty="0"/>
+              <a:t>Ableitung am Beispiel RQ-012</a:t>
+            </a:r>
+          </a:p>
+        </p:txBody>
+      </p:sp>
+      <p:grpSp>
+        <p:nvGrpSpPr>
+          <p:cNvPr id="10" name="Stufe1"/>
+          <p:cNvGrpSpPr/>
+          <p:nvPr/>
+        </p:nvGrpSpPr>
+        <p:grpSpPr>
+          <a:xfrm>
+            <a:off x="373063" y="1550000"/>
+            <a:ext cx="3050000" cy="1900000"/>
+            <a:chOff x="373063" y="1550000"/>
+            <a:chExt cx="3050000" cy="1900000"/>
+          </a:xfrm>
+        </p:grpSpPr>
+        <p:sp>
+          <p:nvSpPr>
+            <p:cNvPr id="11" name="Segment1"/>
+            <p:cNvSpPr/>
+            <p:nvPr/>
+          </p:nvSpPr>
+          <p:spPr>
+            <a:xfrm>
+              <a:off x="373063" y="1550000"/>
+              <a:ext cx="3050000" cy="1900000"/>
+            </a:xfrm>
+            <a:prstGeom prst="homePlate">
+              <a:avLst>
+                <a:gd name="adj" fmla="val 30000"/>
+              </a:avLst>
+            </a:prstGeom>
+            <a:solidFill>
+              <a:schemeClr val="accent4"/>
+            </a:solidFill>
+            <a:ln>
+              <a:noFill/>
+            </a:ln>
+          </p:spPr>
+          <p:txBody>
+            <a:bodyPr/>
+            <a:lstStyle/>
+            <a:p>
+              <a:endParaRPr/>
+            </a:p>
+          </p:txBody>
+        </p:sp>
+        <p:sp>
+          <p:nvSpPr>
+            <p:cNvPr id="12" name="Text1"/>
+            <p:cNvSpPr/>
+            <p:nvPr/>
+          </p:nvSpPr>
+          <p:spPr>
+            <a:xfrm>
+              <a:off x="548063" y="1550000"/>
+              <a:ext cx="2700000" cy="1900000"/>
+            </a:xfrm>
+            <a:prstGeom prst="rect">
+              <a:avLst/>
+            </a:prstGeom>
+            <a:noFill/>
+            <a:ln>
+              <a:noFill/>
+            </a:ln>
+          </p:spPr>
+          <p:txBody>
+            <a:bodyPr wrap="square" lIns="45720" tIns="45720" rIns="45720" bIns="45720" anchor="ctr">
+              <a:noAutofit/>
+            </a:bodyPr>
+            <a:lstStyle/>
+            <a:p>
+              <a:pPr algn="ctr"/>
+              <a:r>
+                <a:rPr lang="de-DE" sz="1800" b="1" dirty="0">
+                  <a:solidFill>
+                    <a:schemeClr val="accent1"/>
+                  </a:solidFill>
+                </a:rPr>
+                <a:t>1</a:t>
+              </a:r>
+            </a:p>
+            <a:p>
+              <a:pPr algn="ctr"/>
+              <a:r>
+                <a:rPr lang="de-DE" sz="1400" b="1" dirty="0">
+                  <a:solidFill>
+                    <a:schemeClr val="accent1"/>
+                  </a:solidFill>
+                </a:rPr>
+                <a:t>Anhang III, 1.2.1</a:t>
+              </a:r>
+            </a:p>
+            <a:p>
+              <a:pPr algn="ctr"/>
+              <a:r>
+                <a:rPr lang="de-DE" sz="1400" b="0" dirty="0">
+                  <a:solidFill>
+                    <a:schemeClr val="accent1"/>
+                  </a:solidFill>
+                </a:rPr>
+                <a:t>Tracing-Log, fünf Jahre aufzubewahren</a:t>
+              </a:r>
+            </a:p>
+          </p:txBody>
+        </p:sp>
+      </p:grpSp>
+      <p:grpSp>
+        <p:nvGrpSpPr>
+          <p:cNvPr id="20" name="Stufe2"/>
+          <p:cNvGrpSpPr/>
+          <p:nvPr/>
+        </p:nvGrpSpPr>
+        <p:grpSpPr>
+          <a:xfrm>
+            <a:off x="3123063" y="1550000"/>
+            <a:ext cx="3050000" cy="1900000"/>
+            <a:chOff x="3123063" y="1550000"/>
+            <a:chExt cx="3050000" cy="1900000"/>
+          </a:xfrm>
+        </p:grpSpPr>
+        <p:sp>
+          <p:nvSpPr>
+            <p:cNvPr id="21" name="Segment2"/>
+            <p:cNvSpPr/>
+            <p:nvPr/>
+          </p:nvSpPr>
+          <p:spPr>
+            <a:xfrm>
+              <a:off x="3123063" y="1550000"/>
+              <a:ext cx="3050000" cy="1900000"/>
+            </a:xfrm>
+            <a:prstGeom prst="chevron">
+              <a:avLst>
+                <a:gd name="adj" fmla="val 30000"/>
+              </a:avLst>
+            </a:prstGeom>
+            <a:solidFill>
+              <a:schemeClr val="accent3"/>
+            </a:solidFill>
+            <a:ln>
+              <a:noFill/>
+            </a:ln>
+          </p:spPr>
+          <p:txBody>
+            <a:bodyPr/>
+            <a:lstStyle/>
+            <a:p>
+              <a:endParaRPr/>
+            </a:p>
+          </p:txBody>
+        </p:sp>
+        <p:sp>
+          <p:nvSpPr>
+            <p:cNvPr id="22" name="Text2"/>
+            <p:cNvSpPr/>
+            <p:nvPr/>
+          </p:nvSpPr>
+          <p:spPr>
+            <a:xfrm>
+              <a:off x="3523063" y="1550000"/>
+              <a:ext cx="2250000" cy="1900000"/>
+            </a:xfrm>
+            <a:prstGeom prst="rect">
+              <a:avLst/>
+            </a:prstGeom>
+            <a:noFill/>
+            <a:ln>
+              <a:noFill/>
+            </a:ln>
+          </p:spPr>
+          <p:txBody>
+            <a:bodyPr wrap="square" lIns="45720" tIns="45720" rIns="45720" bIns="45720" anchor="ctr">
+              <a:noAutofit/>
+            </a:bodyPr>
+            <a:lstStyle/>
+            <a:p>
+              <a:pPr algn="ctr"/>
+              <a:r>
+                <a:rPr lang="de-DE" sz="1800" b="1" dirty="0">
+                  <a:solidFill>
+                    <a:srgbClr val="FFFFFF"/>
+                  </a:solidFill>
+                </a:rPr>
+                <a:t>2</a:t>
+              </a:r>
+            </a:p>
+            <a:p>
+              <a:pPr algn="ctr"/>
+              <a:r>
+                <a:rPr lang="de-DE" sz="1400" b="1" dirty="0">
+                  <a:solidFill>
+                    <a:srgbClr val="FFFFFF"/>
+                  </a:solidFill>
+                </a:rPr>
+                <a:t>prEN 50742 §7.3.4</a:t>
+              </a:r>
+            </a:p>
+            <a:p>
+              <a:pPr algn="ctr"/>
+              <a:r>
+                <a:rPr lang="de-DE" sz="1400" b="0" dirty="0">
+                  <a:solidFill>
+                    <a:srgbClr val="FFFFFF"/>
+                  </a:solidFill>
+                </a:rPr>
+                <a:t>Mindestinhalt und Aufbewahrung</a:t>
+              </a:r>
+            </a:p>
+          </p:txBody>
+        </p:sp>
+      </p:grpSp>
+      <p:grpSp>
+        <p:nvGrpSpPr>
+          <p:cNvPr id="30" name="Stufe3"/>
+          <p:cNvGrpSpPr/>
+          <p:nvPr/>
+        </p:nvGrpSpPr>
+        <p:grpSpPr>
+          <a:xfrm>
+            <a:off x="5873063" y="1550000"/>
+            <a:ext cx="3050000" cy="1900000"/>
+            <a:chOff x="5873063" y="1550000"/>
+            <a:chExt cx="3050000" cy="1900000"/>
+          </a:xfrm>
+        </p:grpSpPr>
+        <p:sp>
+          <p:nvSpPr>
+            <p:cNvPr id="31" name="Segment3"/>
+            <p:cNvSpPr/>
+            <p:nvPr/>
+          </p:nvSpPr>
+          <p:spPr>
+            <a:xfrm>
+              <a:off x="5873063" y="1550000"/>
+              <a:ext cx="3050000" cy="1900000"/>
+            </a:xfrm>
+            <a:prstGeom prst="chevron">
+              <a:avLst>
+                <a:gd name="adj" fmla="val 30000"/>
+              </a:avLst>
+            </a:prstGeom>
+            <a:solidFill>
+              <a:schemeClr val="accent2"/>
+            </a:solidFill>
+            <a:ln>
+              <a:noFill/>
+            </a:ln>
+          </p:spPr>
+          <p:txBody>
+            <a:bodyPr/>
+            <a:lstStyle/>
+            <a:p>
+              <a:endParaRPr/>
+            </a:p>
+          </p:txBody>
+        </p:sp>
+        <p:sp>
+          <p:nvSpPr>
+            <p:cNvPr id="32" name="Text3"/>
+            <p:cNvSpPr/>
+            <p:nvPr/>
+          </p:nvSpPr>
+          <p:spPr>
+            <a:xfrm>
+              <a:off x="6273063" y="1550000"/>
+              <a:ext cx="2250000" cy="1900000"/>
+            </a:xfrm>
+            <a:prstGeom prst="rect">
+              <a:avLst/>
+            </a:prstGeom>
+            <a:noFill/>
+            <a:ln>
+              <a:noFill/>
+            </a:ln>
+          </p:spPr>
+          <p:txBody>
+            <a:bodyPr wrap="square" lIns="45720" tIns="45720" rIns="45720" bIns="45720" anchor="ctr">
+              <a:noAutofit/>
+            </a:bodyPr>
+            <a:lstStyle/>
+            <a:p>
+              <a:pPr algn="ctr"/>
+              <a:r>
+                <a:rPr lang="de-DE" sz="1800" b="1" dirty="0">
+                  <a:solidFill>
+                    <a:srgbClr val="FFFFFF"/>
+                  </a:solidFill>
+                </a:rPr>
+                <a:t>3</a:t>
+              </a:r>
+            </a:p>
+            <a:p>
+              <a:pPr algn="ctr"/>
+              <a:r>
+                <a:rPr lang="de-DE" sz="1400" b="1" dirty="0">
+                  <a:solidFill>
+                    <a:srgbClr val="FFFFFF"/>
+                  </a:solidFill>
+                </a:rPr>
+                <a:t>IEC 62443-4-2</a:t>
+              </a:r>
+            </a:p>
+            <a:p>
+              <a:pPr algn="ctr"/>
+              <a:r>
+                <a:rPr lang="de-DE" sz="1400" b="1" dirty="0">
+                  <a:solidFill>
+                    <a:srgbClr val="FFFFFF"/>
+                  </a:solidFill>
+                </a:rPr>
+                <a:t>CR 2.8 und CR 2.9</a:t>
+              </a:r>
+            </a:p>
+            <a:p>
+              <a:pPr algn="ctr"/>
+              <a:r>
+                <a:rPr lang="de-DE" sz="1400" b="0" dirty="0">
+                  <a:solidFill>
+                    <a:srgbClr val="FFFFFF"/>
+                  </a:solidFill>
+                </a:rPr>
+                <a:t>Auditable Events und Audit Storage Capacity</a:t>
+              </a:r>
+            </a:p>
+          </p:txBody>
+        </p:sp>
+      </p:grpSp>
+      <p:grpSp>
+        <p:nvGrpSpPr>
+          <p:cNvPr id="40" name="Stufe4"/>
+          <p:cNvGrpSpPr/>
+          <p:nvPr/>
+        </p:nvGrpSpPr>
+        <p:grpSpPr>
+          <a:xfrm>
+            <a:off x="8623063" y="1550000"/>
+            <a:ext cx="3050000" cy="1900000"/>
+            <a:chOff x="8623063" y="1550000"/>
+            <a:chExt cx="3050000" cy="1900000"/>
+          </a:xfrm>
+        </p:grpSpPr>
+        <p:sp>
+          <p:nvSpPr>
+            <p:cNvPr id="41" name="Segment4"/>
+            <p:cNvSpPr/>
+            <p:nvPr/>
+          </p:nvSpPr>
+          <p:spPr>
+            <a:xfrm>
+              <a:off x="8623063" y="1550000"/>
+              <a:ext cx="3050000" cy="1900000"/>
+            </a:xfrm>
+            <a:prstGeom prst="chevron">
+              <a:avLst>
+                <a:gd name="adj" fmla="val 30000"/>
+              </a:avLst>
+            </a:prstGeom>
+            <a:solidFill>
+              <a:schemeClr val="accent5"/>
+            </a:solidFill>
+            <a:ln>
+              <a:noFill/>
+            </a:ln>
+          </p:spPr>
+          <p:txBody>
+            <a:bodyPr/>
+            <a:lstStyle/>
+            <a:p>
+              <a:endParaRPr/>
+            </a:p>
+          </p:txBody>
+        </p:sp>
+        <p:sp>
+          <p:nvSpPr>
+            <p:cNvPr id="42" name="Text4"/>
+            <p:cNvSpPr/>
+            <p:nvPr/>
+          </p:nvSpPr>
+          <p:spPr>
+            <a:xfrm>
+              <a:off x="9023063" y="1550000"/>
+              <a:ext cx="2250000" cy="1900000"/>
+            </a:xfrm>
+            <a:prstGeom prst="rect">
+              <a:avLst/>
+            </a:prstGeom>
+            <a:noFill/>
+            <a:ln>
+              <a:noFill/>
+            </a:ln>
+          </p:spPr>
+          <p:txBody>
+            <a:bodyPr wrap="square" lIns="45720" tIns="45720" rIns="45720" bIns="45720" anchor="ctr">
+              <a:noAutofit/>
+            </a:bodyPr>
+            <a:lstStyle/>
+            <a:p>
+              <a:pPr algn="ctr"/>
+              <a:r>
+                <a:rPr lang="de-DE" sz="1800" b="1" dirty="0">
+                  <a:solidFill>
+                    <a:srgbClr val="FFFFFF"/>
+                  </a:solidFill>
+                </a:rPr>
+                <a:t>4</a:t>
+              </a:r>
+            </a:p>
+            <a:p>
+              <a:pPr algn="ctr"/>
+              <a:r>
+                <a:rPr lang="de-DE" sz="1400" b="1" dirty="0">
+                  <a:solidFill>
+                    <a:srgbClr val="FFFFFF"/>
+                  </a:solidFill>
+                </a:rPr>
+                <a:t>Konkreter Testfall am Prüfling</a:t>
+              </a:r>
+            </a:p>
+          </p:txBody>
+        </p:sp>
+      </p:grpSp>
+      <p:sp>
+        <p:nvSpPr>
+          <p:cNvPr id="50" name="Fusszeile"/>
+          <p:cNvSpPr/>
+          <p:nvPr/>
+        </p:nvSpPr>
+        <p:spPr>
+          <a:xfrm>
+            <a:off x="0" y="5330000"/>
+            <a:ext cx="12192000" cy="800000"/>
+          </a:xfrm>
+          <a:prstGeom prst="rect">
+            <a:avLst/>
+          </a:prstGeom>
+          <a:solidFill>
+            <a:schemeClr val="accent2"/>
+          </a:solidFill>
+          <a:ln>
+            <a:noFill/>
+          </a:ln>
+        </p:spPr>
+        <p:txBody>
+          <a:bodyPr wrap="square" lIns="45720" tIns="45720" rIns="45720" bIns="45720" anchor="ctr">
+            <a:noAutofit/>
+          </a:bodyPr>
+          <a:lstStyle/>
+          <a:p>
+            <a:pPr algn="ctr"/>
+            <a:r>
+              <a:rPr lang="de-DE" sz="1800" b="1" dirty="0">
+                <a:solidFill>
+                  <a:srgbClr val="FFFFFF"/>
+                </a:solidFill>
+              </a:rPr>
+              <a:t>14 abgeleitete Anforderungen insgesamt · Bewertungsbasis SL-C 1</a:t>
+            </a:r>
+          </a:p>
+        </p:txBody>
+      </p:sp>
+    </p:spTree>
+  </p:cSld>
+  <p:clrMapOvr>
+    <a:masterClrMapping/>
+  </p:clrMapOvr>
+  <mc:AlternateContent xmlns:mc="http://schemas.openxmlformats.org/markup-compatibility/2006">
+    <mc:Choice xmlns:p159="http://schemas.microsoft.com/office/powerpoint/2015/09/main" Requires="p159">
+      <p:transition xmlns:p14="http://schemas.microsoft.com/office/powerpoint/2010/main" spd="slow" p14:dur="2000">
+        <p159:morph option="byObject"/>
+      </p:transition>
+    </mc:Choice>
+    <mc:Fallback>
+      <p:transition spd="slow">
+        <p:fade/>
+      </p:transition>
+    </mc:Fallback>
+  </mc:AlternateContent>
+  <p:timing>
+    <p:tnLst>
+      <p:par>
+        <p:cTn id="1" dur="indefinite" restart="never" nodeType="tmRoot">
+          <p:childTnLst>
+            <p:seq concurrent="1" nextAc="seek">
+              <p:cTn id="2" dur="indefinite" nodeType="mainSeq">
+                <p:childTnLst>
+                  <p:par>
+                    <p:cTn id="3" fill="hold">
+                      <p:stCondLst>
+                        <p:cond delay="indefinite"/>
+                      </p:stCondLst>
+                      <p:childTnLst>
+                        <p:par>
+                          <p:cTn id="4" fill="hold">
+                            <p:stCondLst>
+                              <p:cond delay="0"/>
+                            </p:stCondLst>
+                            <p:childTnLst>
+                              <p:par>
+                                <p:cTn id="5" presetID="10" presetClass="entr" presetSubtype="0" fill="hold" nodeType="withEffect">
+                                  <p:stCondLst>
+                                    <p:cond delay="0"/>
+                                  </p:stCondLst>
+                                  <p:childTnLst>
+                                    <p:set>
+                                      <p:cBhvr>
+                                        <p:cTn id="6" dur="1" fill="hold">
+                                          <p:stCondLst>
+                                            <p:cond delay="0"/>
+                                          </p:stCondLst>
+                                        </p:cTn>
+                                        <p:tgtEl>
+                                          <p:spTgt spid="10"/>
+                                        </p:tgtEl>
+                                        <p:attrNameLst>
+                                          <p:attrName>style.visibility</p:attrName>
+                                        </p:attrNameLst>
+                                      </p:cBhvr>
+                                      <p:to>
+                                        <p:strVal val="visible"/>
+                                      </p:to>
+                                    </p:set>
+                                    <p:animEffect transition="in" filter="fade">
+                                      <p:cBhvr>
+                                        <p:cTn id="7" dur="500"/>
+                                        <p:tgtEl>
+                                          <p:spTgt spid="10"/>
+                                        </p:tgtEl>
+                                      </p:cBhvr>
+                                    </p:animEffect>
+                                  </p:childTnLst>
+                                </p:cTn>
+                              </p:par>
+                            </p:childTnLst>
+                          </p:cTn>
+                        </p:par>
+                      </p:childTnLst>
+                    </p:cTn>
+                  </p:par>
+                  <p:par>
+                    <p:cTn id="8" fill="hold">
+                      <p:stCondLst>
+                        <p:cond delay="indefinite"/>
+                      </p:stCondLst>
+                      <p:childTnLst>
+                        <p:par>
+                          <p:cTn id="9" fill="hold">
+                            <p:stCondLst>
+                              <p:cond delay="0"/>
+                            </p:stCondLst>
+                            <p:childTnLst>
+                              <p:par>
+                                <p:cTn id="10" presetID="10" presetClass="entr" presetSubtype="0" fill="hold" nodeType="clickEffect">
+                                  <p:stCondLst>
+                                    <p:cond delay="0"/>
+                                  </p:stCondLst>
+                                  <p:childTnLst>
+                                    <p:set>
+                                      <p:cBhvr>
+                                        <p:cTn id="11" dur="1" fill="hold">
+                                          <p:stCondLst>
+                                            <p:cond delay="0"/>
+                                          </p:stCondLst>
+                                        </p:cTn>
+                                        <p:tgtEl>
+                                          <p:spTgt spid="20"/>
+                                        </p:tgtEl>
+                                        <p:attrNameLst>
+                                          <p:attrName>style.visibility</p:attrName>
+                                        </p:attrNameLst>
+                                      </p:cBhvr>
+                                      <p:to>
+                                        <p:strVal val="visible"/>
+                                      </p:to>
+                                    </p:set>
+                                    <p:animEffect transition="in" filter="fade">
+                                      <p:cBhvr>
+                                        <p:cTn id="12" dur="500"/>
+                                        <p:tgtEl>
+                                          <p:spTgt spid="20"/>
+                                        </p:tgtEl>
+                                      </p:cBhvr>
+                                    </p:animEffect>
+                                  </p:childTnLst>
+                                </p:cTn>
+                              </p:par>
+                            </p:childTnLst>
+                          </p:cTn>
+                        </p:par>
+                      </p:childTnLst>
+                    </p:cTn>
+                  </p:par>
+                  <p:par>
+                    <p:cTn id="13" fill="hold">
+                      <p:stCondLst>
+                        <p:cond delay="indefinite"/>
+                      </p:stCondLst>
+                      <p:childTnLst>
+                        <p:par>
+                          <p:cTn id="14" fill="hold">
+                            <p:stCondLst>
+                              <p:cond delay="0"/>
+                            </p:stCondLst>
+                            <p:childTnLst>
+                              <p:par>
+                                <p:cTn id="15" presetID="10" presetClass="entr" presetSubtype="0" fill="hold" nodeType="clickEffect">
+                                  <p:stCondLst>
+                                    <p:cond delay="0"/>
+                                  </p:stCondLst>
+                                  <p:childTnLst>
+                                    <p:set>
+                                      <p:cBhvr>
+                                        <p:cTn id="16" dur="1" fill="hold">
+                                          <p:stCondLst>
+                                            <p:cond delay="0"/>
+                                          </p:stCondLst>
+                                        </p:cTn>
+                                        <p:tgtEl>
+                                          <p:spTgt spid="30"/>
+                                        </p:tgtEl>
+                                        <p:attrNameLst>
+                                          <p:attrName>style.visibility</p:attrName>
+                                        </p:attrNameLst>
+                                      </p:cBhvr>
+                                      <p:to>
+                                        <p:strVal val="visible"/>
+                                      </p:to>
+                                    </p:set>
+                                    <p:animEffect transition="in" filter="fade">
+                                      <p:cBhvr>
+                                        <p:cTn id="17" dur="500"/>
+                                        <p:tgtEl>
+                                          <p:spTgt spid="30"/>
+                                        </p:tgtEl>
+                                      </p:cBhvr>
+                                    </p:animEffect>
+                                  </p:childTnLst>
+                                </p:cTn>
+                              </p:par>
+                            </p:childTnLst>
+                          </p:cTn>
+                        </p:par>
+                      </p:childTnLst>
+                    </p:cTn>
+                  </p:par>
+                  <p:par>
+                    <p:cTn id="18" fill="hold">
+                      <p:stCondLst>
+                        <p:cond delay="indefinite"/>
+                      </p:stCondLst>
+                      <p:childTnLst>
+                        <p:par>
+                          <p:cTn id="19" fill="hold">
+                            <p:stCondLst>
+                              <p:cond delay="0"/>
+                            </p:stCondLst>
+                            <p:childTnLst>
+                              <p:par>
+                                <p:cTn id="20" presetID="10" presetClass="entr" presetSubtype="0" fill="hold" nodeType="clickEffect">
+                                  <p:stCondLst>
+                                    <p:cond delay="0"/>
+                                  </p:stCondLst>
+                                  <p:childTnLst>
+                                    <p:set>
+                                      <p:cBhvr>
+                                        <p:cTn id="21" dur="1" fill="hold">
+                                          <p:stCondLst>
+                                            <p:cond delay="0"/>
+                                          </p:stCondLst>
+                                        </p:cTn>
+                                        <p:tgtEl>
+                                          <p:spTgt spid="40"/>
+                                        </p:tgtEl>
+                                        <p:attrNameLst>
+                                          <p:attrName>style.visibility</p:attrName>
+                                        </p:attrNameLst>
+                                      </p:cBhvr>
+                                      <p:to>
+                                        <p:strVal val="visible"/>
+                                      </p:to>
+                                    </p:set>
+                                    <p:animEffect transition="in" filter="fade">
+                                      <p:cBhvr>
+                                        <p:cTn id="22" dur="500"/>
+                                        <p:tgtEl>
+                                          <p:spTgt spid="40"/>
+                                        </p:tgtEl>
+                                      </p:cBhvr>
+                                    </p:animEffect>
+                                  </p:childTnLst>
+                                </p:cTn>
+                              </p:par>
+                            </p:childTnLst>
+                          </p:cTn>
+                        </p:par>
+                        <p:par>
+                          <p:cTn id="23" fill="hold">
+                            <p:stCondLst>
+                              <p:cond delay="0"/>
+                            </p:stCondLst>
+                            <p:childTnLst>
+                              <p:par>
+                                <p:cTn id="24" presetID="1" presetClass="emph" presetSubtype="0" fill="hold" nodeType="afterEffect">
+                                  <p:stCondLst>
+                                    <p:cond delay="0"/>
+                                  </p:stCondLst>
+                                  <p:childTnLst>
+                                    <p:anim calcmode="lin" valueType="num">
+                                      <p:cBhvr>
+                                        <p:cTn id="25" dur="500" autoRev="1" fill="hold"/>
+                                        <p:tgtEl>
+                                          <p:spTgt spid="40"/>
+                                        </p:tgtEl>
+                                        <p:attrNameLst>
+                                          <p:attrName>style.opacity</p:attrName>
+                                        </p:attrNameLst>
+                                      </p:cBhvr>
+                                      <p:tavLst>
+                                        <p:tav tm="0">
+                                          <p:val>
+                                            <p:fltVal val="1"/>
+                                          </p:val>
+                                        </p:tav>
+                                        <p:tav tm="100000">
+                                          <p:val>
+                                            <p:fltVal val="0.3"/>
+                                          </p:val>
+                                        </p:tav>
+                                      </p:tavLst>
+                                    </p:anim>
+                                  </p:childTnLst>
+                                </p:cTn>
+                              </p:par>
+                            </p:childTnLst>
+                          </p:cTn>
+                        </p:par>
+                      </p:childTnLst>
+                    </p:cTn>
+                  </p:par>
+                  <p:par>
+                    <p:cTn id="26" fill="hold">
+                      <p:stCondLst>
+                        <p:cond delay="indefinite"/>
+                      </p:stCondLst>
+                      <p:childTnLst>
+                        <p:par>
+                          <p:cTn id="27" fill="hold">
+                            <p:stCondLst>
+                              <p:cond delay="0"/>
+                            </p:stCondLst>
+                            <p:childTnLst>
+                              <p:par>
+                                <p:cTn id="28" presetID="10" presetClass="entr" presetSubtype="0" fill="hold" nodeType="clickEffect">
+                                  <p:stCondLst>
+                                    <p:cond delay="0"/>
+                                  </p:stCondLst>
+                                  <p:childTnLst>
+                                    <p:set>
+                                      <p:cBhvr>
+                                        <p:cTn id="29" dur="1" fill="hold">
+                                          <p:stCondLst>
+                                            <p:cond delay="0"/>
+                                          </p:stCondLst>
+                                        </p:cTn>
+                                        <p:tgtEl>
+                                          <p:spTgt spid="50"/>
+                                        </p:tgtEl>
+                                        <p:attrNameLst>
+                                          <p:attrName>style.visibility</p:attrName>
+                                        </p:attrNameLst>
+                                      </p:cBhvr>
+                                      <p:to>
+                                        <p:strVal val="visible"/>
+                                      </p:to>
+                                    </p:set>
+                                    <p:animEffect transition="in" filter="fade">
+                                      <p:cBhvr>
+                                        <p:cTn id="30" dur="500"/>
+                                        <p:tgtEl>
+                                          <p:spTgt spid="50"/>
+                                        </p:tgtEl>
+                                      </p:cBhvr>
+                                    </p:animEffect>
+                                  </p:childTnLst>
+                                </p:cTn>
+                              </p:par>
+                            </p:childTnLst>
+                          </p:cTn>
+                        </p:par>
+                      </p:childTnLst>
+                    </p:cTn>
+                  </p:par>
+                </p:childTnLst>
+              </p:cTn>
+              <p:prevCondLst>
+                <p:cond evt="onPrev" delay="0">
+                  <p:tgtEl>
+                    <p:sldTgt/>
+                  </p:tgtEl>
+                </p:cond>
+              </p:prevCondLst>
+              <p:nextCondLst>
+                <p:cond evt="onNext" delay="0">
+                  <p:tgtEl>
+                    <p:sldTgt/>
+                  </p:tgtEl>
+                </p:cond>
+              </p:nextCondLst>
+            </p:seq>
+          </p:childTnLst>
+        </p:cTn>
+      </p:par>
+    </p:tnLst>
+    <p:bldLst>
+      <p:bldP spid="10" grpId="0"/>
+      <p:bldP spid="20" grpId="0"/>
+      <p:bldP spid="30" grpId="0"/>
+      <p:bldP spid="40" grpId="0"/>
+      <p:bldP spid="50" grpId="0"/>
+    </p:bldLst>
+  </p:timing>
+</p:sld>
+</file>
+
+<file path=ppt/slides/slide8.xml><?xml version="1.0" encoding="utf-8"?>
 <p:sld xmlns:a="http://schemas.openxmlformats.org/drawingml/2006/main" xmlns:r="http://schemas.openxmlformats.org/officeDocument/2006/relationships" xmlns:p="http://schemas.openxmlformats.org/presentationml/2006/main">
   <p:cSld>
     <p:spTree>
@@ -41368,7 +42310,7 @@
 </p:sld>
 </file>
 
-<file path=ppt/slides/slide8.xml><?xml version="1.0" encoding="utf-8"?>
+<file path=ppt/slides/slide9.xml><?xml version="1.0" encoding="utf-8"?>
 <p:sld xmlns:a="http://schemas.openxmlformats.org/drawingml/2006/main" xmlns:r="http://schemas.openxmlformats.org/officeDocument/2006/relationships" xmlns:p="http://schemas.openxmlformats.org/presentationml/2006/main">
   <p:cSld>
     <p:spTree>
@@ -42648,867 +43590,6 @@
       <p:bldP spid="50" grpId="0"/>
       <p:bldP spid="60" grpId="0"/>
       <p:bldP spid="70" grpId="0"/>
-    </p:bldLst>
-  </p:timing>
-</p:sld>
-</file>
-
-<file path=ppt/slides/slide9.xml><?xml version="1.0" encoding="utf-8"?>
-<p:sld xmlns:a="http://schemas.openxmlformats.org/drawingml/2006/main" xmlns:r="http://schemas.openxmlformats.org/officeDocument/2006/relationships" xmlns:p="http://schemas.openxmlformats.org/presentationml/2006/main">
-  <p:cSld>
-    <p:spTree>
-      <p:nvGrpSpPr>
-        <p:cNvPr id="1" name=""/>
-        <p:cNvGrpSpPr/>
-        <p:nvPr/>
-      </p:nvGrpSpPr>
-      <p:grpSpPr>
-        <a:xfrm>
-          <a:off x="0" y="0"/>
-          <a:ext cx="0" cy="0"/>
-          <a:chOff x="0" y="0"/>
-          <a:chExt cx="0" cy="0"/>
-        </a:xfrm>
-      </p:grpSpPr>
-      <p:sp>
-        <p:nvSpPr>
-          <p:cNvPr id="2" name="Titel 1"/>
-          <p:cNvSpPr>
-            <a:spLocks noGrp="1"/>
-          </p:cNvSpPr>
-          <p:nvPr>
-            <p:ph type="title"/>
-          </p:nvPr>
-        </p:nvSpPr>
-        <p:spPr/>
-        <p:txBody>
-          <a:bodyPr/>
-          <a:lstStyle/>
-          <a:p>
-            <a:r>
-              <a:rPr lang="de-DE" dirty="0"/>
-              <a:t>Ableitung am Beispiel RQ-012</a:t>
-            </a:r>
-          </a:p>
-        </p:txBody>
-      </p:sp>
-      <p:grpSp>
-        <p:nvGrpSpPr>
-          <p:cNvPr id="10" name="Stufe1"/>
-          <p:cNvGrpSpPr/>
-          <p:nvPr/>
-        </p:nvGrpSpPr>
-        <p:grpSpPr>
-          <a:xfrm>
-            <a:off x="373063" y="1550000"/>
-            <a:ext cx="3050000" cy="1900000"/>
-            <a:chOff x="373063" y="1550000"/>
-            <a:chExt cx="3050000" cy="1900000"/>
-          </a:xfrm>
-        </p:grpSpPr>
-        <p:sp>
-          <p:nvSpPr>
-            <p:cNvPr id="11" name="Segment1"/>
-            <p:cNvSpPr/>
-            <p:nvPr/>
-          </p:nvSpPr>
-          <p:spPr>
-            <a:xfrm>
-              <a:off x="373063" y="1550000"/>
-              <a:ext cx="3050000" cy="1900000"/>
-            </a:xfrm>
-            <a:prstGeom prst="homePlate">
-              <a:avLst>
-                <a:gd name="adj" fmla="val 30000"/>
-              </a:avLst>
-            </a:prstGeom>
-            <a:solidFill>
-              <a:schemeClr val="accent4"/>
-            </a:solidFill>
-            <a:ln>
-              <a:noFill/>
-            </a:ln>
-          </p:spPr>
-          <p:txBody>
-            <a:bodyPr/>
-            <a:lstStyle/>
-            <a:p>
-              <a:endParaRPr/>
-            </a:p>
-          </p:txBody>
-        </p:sp>
-        <p:sp>
-          <p:nvSpPr>
-            <p:cNvPr id="12" name="Text1"/>
-            <p:cNvSpPr/>
-            <p:nvPr/>
-          </p:nvSpPr>
-          <p:spPr>
-            <a:xfrm>
-              <a:off x="548063" y="1550000"/>
-              <a:ext cx="2700000" cy="1900000"/>
-            </a:xfrm>
-            <a:prstGeom prst="rect">
-              <a:avLst/>
-            </a:prstGeom>
-            <a:noFill/>
-            <a:ln>
-              <a:noFill/>
-            </a:ln>
-          </p:spPr>
-          <p:txBody>
-            <a:bodyPr wrap="square" lIns="45720" tIns="45720" rIns="45720" bIns="45720" anchor="ctr">
-              <a:noAutofit/>
-            </a:bodyPr>
-            <a:lstStyle/>
-            <a:p>
-              <a:pPr algn="ctr"/>
-              <a:r>
-                <a:rPr lang="de-DE" sz="1800" b="1" dirty="0">
-                  <a:solidFill>
-                    <a:schemeClr val="accent1"/>
-                  </a:solidFill>
-                </a:rPr>
-                <a:t>1</a:t>
-              </a:r>
-            </a:p>
-            <a:p>
-              <a:pPr algn="ctr"/>
-              <a:r>
-                <a:rPr lang="de-DE" sz="1400" b="1" dirty="0">
-                  <a:solidFill>
-                    <a:schemeClr val="accent1"/>
-                  </a:solidFill>
-                </a:rPr>
-                <a:t>Anhang III, 1.2.1</a:t>
-              </a:r>
-            </a:p>
-            <a:p>
-              <a:pPr algn="ctr"/>
-              <a:r>
-                <a:rPr lang="de-DE" sz="1400" b="0" dirty="0">
-                  <a:solidFill>
-                    <a:schemeClr val="accent1"/>
-                  </a:solidFill>
-                </a:rPr>
-                <a:t>Tracing-Log, fünf Jahre aufzubewahren</a:t>
-              </a:r>
-            </a:p>
-          </p:txBody>
-        </p:sp>
-      </p:grpSp>
-      <p:grpSp>
-        <p:nvGrpSpPr>
-          <p:cNvPr id="20" name="Stufe2"/>
-          <p:cNvGrpSpPr/>
-          <p:nvPr/>
-        </p:nvGrpSpPr>
-        <p:grpSpPr>
-          <a:xfrm>
-            <a:off x="3123063" y="1550000"/>
-            <a:ext cx="3050000" cy="1900000"/>
-            <a:chOff x="3123063" y="1550000"/>
-            <a:chExt cx="3050000" cy="1900000"/>
-          </a:xfrm>
-        </p:grpSpPr>
-        <p:sp>
-          <p:nvSpPr>
-            <p:cNvPr id="21" name="Segment2"/>
-            <p:cNvSpPr/>
-            <p:nvPr/>
-          </p:nvSpPr>
-          <p:spPr>
-            <a:xfrm>
-              <a:off x="3123063" y="1550000"/>
-              <a:ext cx="3050000" cy="1900000"/>
-            </a:xfrm>
-            <a:prstGeom prst="chevron">
-              <a:avLst>
-                <a:gd name="adj" fmla="val 30000"/>
-              </a:avLst>
-            </a:prstGeom>
-            <a:solidFill>
-              <a:schemeClr val="accent3"/>
-            </a:solidFill>
-            <a:ln>
-              <a:noFill/>
-            </a:ln>
-          </p:spPr>
-          <p:txBody>
-            <a:bodyPr/>
-            <a:lstStyle/>
-            <a:p>
-              <a:endParaRPr/>
-            </a:p>
-          </p:txBody>
-        </p:sp>
-        <p:sp>
-          <p:nvSpPr>
-            <p:cNvPr id="22" name="Text2"/>
-            <p:cNvSpPr/>
-            <p:nvPr/>
-          </p:nvSpPr>
-          <p:spPr>
-            <a:xfrm>
-              <a:off x="3523063" y="1550000"/>
-              <a:ext cx="2250000" cy="1900000"/>
-            </a:xfrm>
-            <a:prstGeom prst="rect">
-              <a:avLst/>
-            </a:prstGeom>
-            <a:noFill/>
-            <a:ln>
-              <a:noFill/>
-            </a:ln>
-          </p:spPr>
-          <p:txBody>
-            <a:bodyPr wrap="square" lIns="45720" tIns="45720" rIns="45720" bIns="45720" anchor="ctr">
-              <a:noAutofit/>
-            </a:bodyPr>
-            <a:lstStyle/>
-            <a:p>
-              <a:pPr algn="ctr"/>
-              <a:r>
-                <a:rPr lang="de-DE" sz="1800" b="1" dirty="0">
-                  <a:solidFill>
-                    <a:srgbClr val="FFFFFF"/>
-                  </a:solidFill>
-                </a:rPr>
-                <a:t>2</a:t>
-              </a:r>
-            </a:p>
-            <a:p>
-              <a:pPr algn="ctr"/>
-              <a:r>
-                <a:rPr lang="de-DE" sz="1400" b="1" dirty="0">
-                  <a:solidFill>
-                    <a:srgbClr val="FFFFFF"/>
-                  </a:solidFill>
-                </a:rPr>
-                <a:t>prEN 50742 §7.3.4</a:t>
-              </a:r>
-            </a:p>
-            <a:p>
-              <a:pPr algn="ctr"/>
-              <a:r>
-                <a:rPr lang="de-DE" sz="1400" b="0" dirty="0">
-                  <a:solidFill>
-                    <a:srgbClr val="FFFFFF"/>
-                  </a:solidFill>
-                </a:rPr>
-                <a:t>Mindestinhalt und Aufbewahrung</a:t>
-              </a:r>
-            </a:p>
-          </p:txBody>
-        </p:sp>
-      </p:grpSp>
-      <p:grpSp>
-        <p:nvGrpSpPr>
-          <p:cNvPr id="30" name="Stufe3"/>
-          <p:cNvGrpSpPr/>
-          <p:nvPr/>
-        </p:nvGrpSpPr>
-        <p:grpSpPr>
-          <a:xfrm>
-            <a:off x="5873063" y="1550000"/>
-            <a:ext cx="3050000" cy="1900000"/>
-            <a:chOff x="5873063" y="1550000"/>
-            <a:chExt cx="3050000" cy="1900000"/>
-          </a:xfrm>
-        </p:grpSpPr>
-        <p:sp>
-          <p:nvSpPr>
-            <p:cNvPr id="31" name="Segment3"/>
-            <p:cNvSpPr/>
-            <p:nvPr/>
-          </p:nvSpPr>
-          <p:spPr>
-            <a:xfrm>
-              <a:off x="5873063" y="1550000"/>
-              <a:ext cx="3050000" cy="1900000"/>
-            </a:xfrm>
-            <a:prstGeom prst="chevron">
-              <a:avLst>
-                <a:gd name="adj" fmla="val 30000"/>
-              </a:avLst>
-            </a:prstGeom>
-            <a:solidFill>
-              <a:schemeClr val="accent2"/>
-            </a:solidFill>
-            <a:ln>
-              <a:noFill/>
-            </a:ln>
-          </p:spPr>
-          <p:txBody>
-            <a:bodyPr/>
-            <a:lstStyle/>
-            <a:p>
-              <a:endParaRPr/>
-            </a:p>
-          </p:txBody>
-        </p:sp>
-        <p:sp>
-          <p:nvSpPr>
-            <p:cNvPr id="32" name="Text3"/>
-            <p:cNvSpPr/>
-            <p:nvPr/>
-          </p:nvSpPr>
-          <p:spPr>
-            <a:xfrm>
-              <a:off x="6273063" y="1550000"/>
-              <a:ext cx="2250000" cy="1900000"/>
-            </a:xfrm>
-            <a:prstGeom prst="rect">
-              <a:avLst/>
-            </a:prstGeom>
-            <a:noFill/>
-            <a:ln>
-              <a:noFill/>
-            </a:ln>
-          </p:spPr>
-          <p:txBody>
-            <a:bodyPr wrap="square" lIns="45720" tIns="45720" rIns="45720" bIns="45720" anchor="ctr">
-              <a:noAutofit/>
-            </a:bodyPr>
-            <a:lstStyle/>
-            <a:p>
-              <a:pPr algn="ctr"/>
-              <a:r>
-                <a:rPr lang="de-DE" sz="1800" b="1" dirty="0">
-                  <a:solidFill>
-                    <a:srgbClr val="FFFFFF"/>
-                  </a:solidFill>
-                </a:rPr>
-                <a:t>3</a:t>
-              </a:r>
-            </a:p>
-            <a:p>
-              <a:pPr algn="ctr"/>
-              <a:r>
-                <a:rPr lang="de-DE" sz="1400" b="1" dirty="0">
-                  <a:solidFill>
-                    <a:srgbClr val="FFFFFF"/>
-                  </a:solidFill>
-                </a:rPr>
-                <a:t>IEC 62443-4-2</a:t>
-              </a:r>
-            </a:p>
-            <a:p>
-              <a:pPr algn="ctr"/>
-              <a:r>
-                <a:rPr lang="de-DE" sz="1400" b="1" dirty="0">
-                  <a:solidFill>
-                    <a:srgbClr val="FFFFFF"/>
-                  </a:solidFill>
-                </a:rPr>
-                <a:t>CR 2.8 und CR 2.9</a:t>
-              </a:r>
-            </a:p>
-            <a:p>
-              <a:pPr algn="ctr"/>
-              <a:r>
-                <a:rPr lang="de-DE" sz="1400" b="0" dirty="0">
-                  <a:solidFill>
-                    <a:srgbClr val="FFFFFF"/>
-                  </a:solidFill>
-                </a:rPr>
-                <a:t>Auditable Events und Audit Storage Capacity</a:t>
-              </a:r>
-            </a:p>
-          </p:txBody>
-        </p:sp>
-      </p:grpSp>
-      <p:grpSp>
-        <p:nvGrpSpPr>
-          <p:cNvPr id="40" name="Stufe4"/>
-          <p:cNvGrpSpPr/>
-          <p:nvPr/>
-        </p:nvGrpSpPr>
-        <p:grpSpPr>
-          <a:xfrm>
-            <a:off x="8623063" y="1550000"/>
-            <a:ext cx="3050000" cy="1900000"/>
-            <a:chOff x="8623063" y="1550000"/>
-            <a:chExt cx="3050000" cy="1900000"/>
-          </a:xfrm>
-        </p:grpSpPr>
-        <p:sp>
-          <p:nvSpPr>
-            <p:cNvPr id="41" name="Segment4"/>
-            <p:cNvSpPr/>
-            <p:nvPr/>
-          </p:nvSpPr>
-          <p:spPr>
-            <a:xfrm>
-              <a:off x="8623063" y="1550000"/>
-              <a:ext cx="3050000" cy="1900000"/>
-            </a:xfrm>
-            <a:prstGeom prst="chevron">
-              <a:avLst>
-                <a:gd name="adj" fmla="val 30000"/>
-              </a:avLst>
-            </a:prstGeom>
-            <a:solidFill>
-              <a:schemeClr val="accent5"/>
-            </a:solidFill>
-            <a:ln>
-              <a:noFill/>
-            </a:ln>
-          </p:spPr>
-          <p:txBody>
-            <a:bodyPr/>
-            <a:lstStyle/>
-            <a:p>
-              <a:endParaRPr/>
-            </a:p>
-          </p:txBody>
-        </p:sp>
-        <p:sp>
-          <p:nvSpPr>
-            <p:cNvPr id="42" name="Text4"/>
-            <p:cNvSpPr/>
-            <p:nvPr/>
-          </p:nvSpPr>
-          <p:spPr>
-            <a:xfrm>
-              <a:off x="9023063" y="1550000"/>
-              <a:ext cx="2250000" cy="1900000"/>
-            </a:xfrm>
-            <a:prstGeom prst="rect">
-              <a:avLst/>
-            </a:prstGeom>
-            <a:noFill/>
-            <a:ln>
-              <a:noFill/>
-            </a:ln>
-          </p:spPr>
-          <p:txBody>
-            <a:bodyPr wrap="square" lIns="45720" tIns="45720" rIns="45720" bIns="45720" anchor="ctr">
-              <a:noAutofit/>
-            </a:bodyPr>
-            <a:lstStyle/>
-            <a:p>
-              <a:pPr algn="ctr"/>
-              <a:r>
-                <a:rPr lang="de-DE" sz="1800" b="1" dirty="0">
-                  <a:solidFill>
-                    <a:srgbClr val="FFFFFF"/>
-                  </a:solidFill>
-                </a:rPr>
-                <a:t>4</a:t>
-              </a:r>
-            </a:p>
-            <a:p>
-              <a:pPr algn="ctr"/>
-              <a:r>
-                <a:rPr lang="de-DE" sz="1400" b="1" dirty="0">
-                  <a:solidFill>
-                    <a:srgbClr val="FFFFFF"/>
-                  </a:solidFill>
-                </a:rPr>
-                <a:t>Konkreter Testfall am Prüfling</a:t>
-              </a:r>
-            </a:p>
-          </p:txBody>
-        </p:sp>
-      </p:grpSp>
-      <p:sp>
-        <p:nvSpPr>
-          <p:cNvPr id="50" name="Fusszeile"/>
-          <p:cNvSpPr/>
-          <p:nvPr/>
-        </p:nvSpPr>
-        <p:spPr>
-          <a:xfrm>
-            <a:off x="0" y="5330000"/>
-            <a:ext cx="12192000" cy="800000"/>
-          </a:xfrm>
-          <a:prstGeom prst="rect">
-            <a:avLst/>
-          </a:prstGeom>
-          <a:solidFill>
-            <a:schemeClr val="accent2"/>
-          </a:solidFill>
-          <a:ln>
-            <a:noFill/>
-          </a:ln>
-        </p:spPr>
-        <p:txBody>
-          <a:bodyPr wrap="square" lIns="45720" tIns="45720" rIns="45720" bIns="45720" anchor="ctr">
-            <a:noAutofit/>
-          </a:bodyPr>
-          <a:lstStyle/>
-          <a:p>
-            <a:pPr algn="ctr"/>
-            <a:r>
-              <a:rPr lang="de-DE" sz="1800" b="1" dirty="0">
-                <a:solidFill>
-                  <a:srgbClr val="FFFFFF"/>
-                </a:solidFill>
-              </a:rPr>
-              <a:t>14 abgeleitete Anforderungen insgesamt · Bewertungsbasis SL-C 1</a:t>
-            </a:r>
-          </a:p>
-        </p:txBody>
-      </p:sp>
-    </p:spTree>
-  </p:cSld>
-  <p:clrMapOvr>
-    <a:masterClrMapping/>
-  </p:clrMapOvr>
-  <mc:AlternateContent xmlns:mc="http://schemas.openxmlformats.org/markup-compatibility/2006">
-    <mc:Choice xmlns:p159="http://schemas.microsoft.com/office/powerpoint/2015/09/main" Requires="p159">
-      <p:transition xmlns:p14="http://schemas.microsoft.com/office/powerpoint/2010/main" spd="slow" p14:dur="2000">
-        <p159:morph option="byObject"/>
-      </p:transition>
-    </mc:Choice>
-    <mc:Fallback>
-      <p:transition spd="slow">
-        <p:fade/>
-      </p:transition>
-    </mc:Fallback>
-  </mc:AlternateContent>
-  <p:timing>
-    <p:tnLst>
-      <p:par>
-        <p:cTn id="1" dur="indefinite" restart="never" nodeType="tmRoot">
-          <p:childTnLst>
-            <p:seq concurrent="1" nextAc="seek">
-              <p:cTn id="2" dur="indefinite" nodeType="mainSeq">
-                <p:childTnLst>
-                  <p:par>
-                    <p:cTn id="3" fill="hold">
-                      <p:stCondLst>
-                        <p:cond delay="indefinite"/>
-                      </p:stCondLst>
-                      <p:childTnLst>
-                        <p:par>
-                          <p:cTn id="4" fill="hold">
-                            <p:stCondLst>
-                              <p:cond delay="0"/>
-                            </p:stCondLst>
-                            <p:childTnLst>
-                              <p:par>
-                                <p:cTn id="5" presetID="10" presetClass="entr" presetSubtype="0" fill="hold" nodeType="withEffect">
-                                  <p:stCondLst>
-                                    <p:cond delay="0"/>
-                                  </p:stCondLst>
-                                  <p:childTnLst>
-                                    <p:set>
-                                      <p:cBhvr>
-                                        <p:cTn id="6" dur="1" fill="hold">
-                                          <p:stCondLst>
-                                            <p:cond delay="0"/>
-                                          </p:stCondLst>
-                                        </p:cTn>
-                                        <p:tgtEl>
-                                          <p:spTgt spid="10"/>
-                                        </p:tgtEl>
-                                        <p:attrNameLst>
-                                          <p:attrName>style.visibility</p:attrName>
-                                        </p:attrNameLst>
-                                      </p:cBhvr>
-                                      <p:to>
-                                        <p:strVal val="visible"/>
-                                      </p:to>
-                                    </p:set>
-                                    <p:animEffect transition="in" filter="fade">
-                                      <p:cBhvr>
-                                        <p:cTn id="7" dur="500"/>
-                                        <p:tgtEl>
-                                          <p:spTgt spid="10"/>
-                                        </p:tgtEl>
-                                      </p:cBhvr>
-                                    </p:animEffect>
-                                  </p:childTnLst>
-                                </p:cTn>
-                              </p:par>
-                            </p:childTnLst>
-                          </p:cTn>
-                        </p:par>
-                      </p:childTnLst>
-                    </p:cTn>
-                  </p:par>
-                  <p:par>
-                    <p:cTn id="8" fill="hold">
-                      <p:stCondLst>
-                        <p:cond delay="indefinite"/>
-                      </p:stCondLst>
-                      <p:childTnLst>
-                        <p:par>
-                          <p:cTn id="9" fill="hold">
-                            <p:stCondLst>
-                              <p:cond delay="0"/>
-                            </p:stCondLst>
-                            <p:childTnLst>
-                              <p:par>
-                                <p:cTn id="10" presetID="10" presetClass="entr" presetSubtype="0" fill="hold" nodeType="clickEffect">
-                                  <p:stCondLst>
-                                    <p:cond delay="0"/>
-                                  </p:stCondLst>
-                                  <p:childTnLst>
-                                    <p:set>
-                                      <p:cBhvr>
-                                        <p:cTn id="11" dur="1" fill="hold">
-                                          <p:stCondLst>
-                                            <p:cond delay="0"/>
-                                          </p:stCondLst>
-                                        </p:cTn>
-                                        <p:tgtEl>
-                                          <p:spTgt spid="20"/>
-                                        </p:tgtEl>
-                                        <p:attrNameLst>
-                                          <p:attrName>style.visibility</p:attrName>
-                                        </p:attrNameLst>
-                                      </p:cBhvr>
-                                      <p:to>
-                                        <p:strVal val="visible"/>
-                                      </p:to>
-                                    </p:set>
-                                    <p:animEffect transition="in" filter="fade">
-                                      <p:cBhvr>
-                                        <p:cTn id="12" dur="500"/>
-                                        <p:tgtEl>
-                                          <p:spTgt spid="20"/>
-                                        </p:tgtEl>
-                                      </p:cBhvr>
-                                    </p:animEffect>
-                                  </p:childTnLst>
-                                </p:cTn>
-                              </p:par>
-                            </p:childTnLst>
-                          </p:cTn>
-                        </p:par>
-                      </p:childTnLst>
-                    </p:cTn>
-                  </p:par>
-                  <p:par>
-                    <p:cTn id="13" fill="hold">
-                      <p:stCondLst>
-                        <p:cond delay="indefinite"/>
-                      </p:stCondLst>
-                      <p:childTnLst>
-                        <p:par>
-                          <p:cTn id="14" fill="hold">
-                            <p:stCondLst>
-                              <p:cond delay="0"/>
-                            </p:stCondLst>
-                            <p:childTnLst>
-                              <p:par>
-                                <p:cTn id="15" presetID="10" presetClass="entr" presetSubtype="0" fill="hold" nodeType="clickEffect">
-                                  <p:stCondLst>
-                                    <p:cond delay="0"/>
-                                  </p:stCondLst>
-                                  <p:childTnLst>
-                                    <p:set>
-                                      <p:cBhvr>
-                                        <p:cTn id="16" dur="1" fill="hold">
-                                          <p:stCondLst>
-                                            <p:cond delay="0"/>
-                                          </p:stCondLst>
-                                        </p:cTn>
-                                        <p:tgtEl>
-                                          <p:spTgt spid="30"/>
-                                        </p:tgtEl>
-                                        <p:attrNameLst>
-                                          <p:attrName>style.visibility</p:attrName>
-                                        </p:attrNameLst>
-                                      </p:cBhvr>
-                                      <p:to>
-                                        <p:strVal val="visible"/>
-                                      </p:to>
-                                    </p:set>
-                                    <p:animEffect transition="in" filter="fade">
-                                      <p:cBhvr>
-                                        <p:cTn id="17" dur="500"/>
-                                        <p:tgtEl>
-                                          <p:spTgt spid="30"/>
-                                        </p:tgtEl>
-                                      </p:cBhvr>
-                                    </p:animEffect>
-                                  </p:childTnLst>
-                                </p:cTn>
-                              </p:par>
-                            </p:childTnLst>
-                          </p:cTn>
-                        </p:par>
-                      </p:childTnLst>
-                    </p:cTn>
-                  </p:par>
-                  <p:par>
-                    <p:cTn id="18" fill="hold">
-                      <p:stCondLst>
-                        <p:cond delay="indefinite"/>
-                      </p:stCondLst>
-                      <p:childTnLst>
-                        <p:par>
-                          <p:cTn id="19" fill="hold">
-                            <p:stCondLst>
-                              <p:cond delay="0"/>
-                            </p:stCondLst>
-                            <p:childTnLst>
-                              <p:par>
-                                <p:cTn id="20" presetID="10" presetClass="entr" presetSubtype="0" fill="hold" nodeType="clickEffect">
-                                  <p:stCondLst>
-                                    <p:cond delay="0"/>
-                                  </p:stCondLst>
-                                  <p:childTnLst>
-                                    <p:set>
-                                      <p:cBhvr>
-                                        <p:cTn id="21" dur="1" fill="hold">
-                                          <p:stCondLst>
-                                            <p:cond delay="0"/>
-                                          </p:stCondLst>
-                                        </p:cTn>
-                                        <p:tgtEl>
-                                          <p:spTgt spid="40"/>
-                                        </p:tgtEl>
-                                        <p:attrNameLst>
-                                          <p:attrName>style.visibility</p:attrName>
-                                        </p:attrNameLst>
-                                      </p:cBhvr>
-                                      <p:to>
-                                        <p:strVal val="visible"/>
-                                      </p:to>
-                                    </p:set>
-                                    <p:animEffect transition="in" filter="fade">
-                                      <p:cBhvr>
-                                        <p:cTn id="22" dur="500"/>
-                                        <p:tgtEl>
-                                          <p:spTgt spid="40"/>
-                                        </p:tgtEl>
-                                      </p:cBhvr>
-                                    </p:animEffect>
-                                  </p:childTnLst>
-                                </p:cTn>
-                              </p:par>
-                            </p:childTnLst>
-                          </p:cTn>
-                        </p:par>
-                        <p:par>
-                          <p:cTn id="23" fill="hold">
-                            <p:stCondLst>
-                              <p:cond delay="0"/>
-                            </p:stCondLst>
-                            <p:childTnLst>
-                              <p:par>
-                                <p:cTn id="24" presetID="1" presetClass="emph" presetSubtype="0" fill="hold" nodeType="afterEffect">
-                                  <p:stCondLst>
-                                    <p:cond delay="0"/>
-                                  </p:stCondLst>
-                                  <p:childTnLst>
-                                    <p:anim calcmode="lin" valueType="num">
-                                      <p:cBhvr>
-                                        <p:cTn id="25" dur="500" autoRev="1" fill="hold"/>
-                                        <p:tgtEl>
-                                          <p:spTgt spid="40"/>
-                                        </p:tgtEl>
-                                        <p:attrNameLst>
-                                          <p:attrName>style.opacity</p:attrName>
-                                        </p:attrNameLst>
-                                      </p:cBhvr>
-                                      <p:tavLst>
-                                        <p:tav tm="0">
-                                          <p:val>
-                                            <p:fltVal val="1"/>
-                                          </p:val>
-                                        </p:tav>
-                                        <p:tav tm="100000">
-                                          <p:val>
-                                            <p:fltVal val="0.3"/>
-                                          </p:val>
-                                        </p:tav>
-                                      </p:tavLst>
-                                    </p:anim>
-                                  </p:childTnLst>
-                                </p:cTn>
-                              </p:par>
-                            </p:childTnLst>
-                          </p:cTn>
-                        </p:par>
-                      </p:childTnLst>
-                    </p:cTn>
-                  </p:par>
-                  <p:par>
-                    <p:cTn id="26" fill="hold">
-                      <p:stCondLst>
-                        <p:cond delay="indefinite"/>
-                      </p:stCondLst>
-                      <p:childTnLst>
-                        <p:par>
-                          <p:cTn id="27" fill="hold">
-                            <p:stCondLst>
-                              <p:cond delay="0"/>
-                            </p:stCondLst>
-                            <p:childTnLst>
-                              <p:par>
-                                <p:cTn id="28" presetID="10" presetClass="entr" presetSubtype="0" fill="hold" nodeType="clickEffect">
-                                  <p:stCondLst>
-                                    <p:cond delay="0"/>
-                                  </p:stCondLst>
-                                  <p:childTnLst>
-                                    <p:set>
-                                      <p:cBhvr>
-                                        <p:cTn id="29" dur="1" fill="hold">
-                                          <p:stCondLst>
-                                            <p:cond delay="0"/>
-                                          </p:stCondLst>
-                                        </p:cTn>
-                                        <p:tgtEl>
-                                          <p:spTgt spid="50"/>
-                                        </p:tgtEl>
-                                        <p:attrNameLst>
-                                          <p:attrName>style.visibility</p:attrName>
-                                        </p:attrNameLst>
-                                      </p:cBhvr>
-                                      <p:to>
-                                        <p:strVal val="visible"/>
-                                      </p:to>
-                                    </p:set>
-                                    <p:animEffect transition="in" filter="fade">
-                                      <p:cBhvr>
-                                        <p:cTn id="30" dur="500"/>
-                                        <p:tgtEl>
-                                          <p:spTgt spid="50"/>
-                                        </p:tgtEl>
-                                      </p:cBhvr>
-                                    </p:animEffect>
-                                  </p:childTnLst>
-                                </p:cTn>
-                              </p:par>
-                            </p:childTnLst>
-                          </p:cTn>
-                        </p:par>
-                      </p:childTnLst>
-                    </p:cTn>
-                  </p:par>
-                </p:childTnLst>
-              </p:cTn>
-              <p:prevCondLst>
-                <p:cond evt="onPrev" delay="0">
-                  <p:tgtEl>
-                    <p:sldTgt/>
-                  </p:tgtEl>
-                </p:cond>
-              </p:prevCondLst>
-              <p:nextCondLst>
-                <p:cond evt="onNext" delay="0">
-                  <p:tgtEl>
-                    <p:sldTgt/>
-                  </p:tgtEl>
-                </p:cond>
-              </p:nextCondLst>
-            </p:seq>
-          </p:childTnLst>
-        </p:cTn>
-      </p:par>
-    </p:tnLst>
-    <p:bldLst>
-      <p:bldP spid="10" grpId="0"/>
-      <p:bldP spid="20" grpId="0"/>
-      <p:bldP spid="30" grpId="0"/>
-      <p:bldP spid="40" grpId="0"/>
-      <p:bldP spid="50" grpId="0"/>
     </p:bldLst>
   </p:timing>
 </p:sld>
@@ -44530,6 +44611,6 @@
 
 <file path=docMetadata/LabelInfo.xml><?xml version="1.0" encoding="utf-8"?>
 <clbl:labelList xmlns:clbl="http://schemas.microsoft.com/office/2020/mipLabelMetadata">
-  <clbl:label id="{e97c528e-e8db-4a71-b5cb-4edd5b40a06c}" enabled="1" method="Standard" siteId="{2782ef14-4849-46b4-b90d-d7e83fc425ca}" contentBits="2" removed="0"/>
+  <clbl:label id="{e97c528e-e8db-4a71-b5cb-4edd5b40a06c}" enabled="1" method="Standard" siteId="{2782ef14-4849-46b4-b90d-d7e83fc425ca}" removed="0"/>
 </clbl:labelList>
 </file>